--- a/outputs/qae_budget_targets_v2_20260908/deck/20260908_llm-vqc.pptx
+++ b/outputs/qae_budget_targets_v2_20260908/deck/20260908_llm-vqc.pptx
@@ -4266,7 +4266,7 @@
               </a:spcAft>
             </a:pPr>
             <a:r>
-              <a:rPr sz="3200" b="1" i="0">
+              <a:rPr sz="3600" b="1" i="0">
                 <a:solidFill>
                   <a:srgbClr val="FFFFFF"/>
                 </a:solidFill>
@@ -4308,7 +4308,7 @@
               </a:spcAft>
             </a:pPr>
             <a:r>
-              <a:rPr sz="1400" b="0" i="0">
+              <a:rPr sz="1700" b="0" i="0">
                 <a:solidFill>
                   <a:srgbClr val="A9B7CE"/>
                 </a:solidFill>
@@ -4328,7 +4328,7 @@
         <p:spPr>
           <a:xfrm>
             <a:off x="566928" y="3611880"/>
-            <a:ext cx="9730898" cy="1316736"/>
+            <a:ext cx="9730898" cy="2075688"/>
           </a:xfrm>
           <a:prstGeom prst="roundRect">
             <a:avLst>
@@ -4376,7 +4376,7 @@
         <p:spPr>
           <a:xfrm>
             <a:off x="768096" y="3721608"/>
-            <a:ext cx="9328562" cy="1097280"/>
+            <a:ext cx="9328562" cy="1856232"/>
           </a:xfrm>
           <a:prstGeom prst="rect">
             <a:avLst/>
@@ -4395,22 +4395,22 @@
               </a:spcAft>
             </a:pPr>
             <a:r>
-              <a:rPr sz="1150" b="1">
+              <a:rPr sz="1300" b="1">
                 <a:solidFill>
                   <a:srgbClr val="FBF4E6"/>
                 </a:solidFill>
                 <a:latin typeface="Arial"/>
               </a:rPr>
-              <a:t>Known before:  </a:t>
-            </a:r>
-            <a:r>
-              <a:rPr sz="1150" b="0">
+              <a:t>Background:  </a:t>
+            </a:r>
+            <a:r>
+              <a:rPr sz="1300" b="0">
                 <a:solidFill>
                   <a:srgbClr val="FFFFFF"/>
                 </a:solidFill>
                 <a:latin typeface="Arial"/>
               </a:rPr>
-              <a:t>physics-informed proposals beat random and greedy circuit search in all seven tested conditions; the closed-loop bonus was not general.</a:t>
+              <a:t>the previous checkpoint showed semantic proposals beat random and greedy search, but ranked methods at one fixed budget.</a:t>
             </a:r>
           </a:p>
           <a:p>
@@ -4420,22 +4420,22 @@
               </a:spcAft>
             </a:pPr>
             <a:r>
-              <a:rPr sz="1150" b="1">
+              <a:rPr sz="1300" b="1">
                 <a:solidFill>
                   <a:srgbClr val="FBF4E6"/>
                 </a:solidFill>
                 <a:latin typeface="Arial"/>
               </a:rPr>
-              <a:t>Measured now:  </a:t>
-            </a:r>
-            <a:r>
-              <a:rPr sz="1150" b="0">
+              <a:t>Question:  </a:t>
+            </a:r>
+            <a:r>
+              <a:rPr sz="1300" b="0">
                 <a:solidFill>
                   <a:srgbClr val="FFFFFF"/>
                 </a:solidFill>
                 <a:latin typeface="Arial"/>
               </a:rPr>
-              <a:t>on the Ising chain the open loop meets the rule at budget 6 (12/12) while the closed loop does not (8/12); raising the XXZ budget from 8 to 10 moved the closed loop from 9/12 to 5/12.</a:t>
+              <a:t>what is the smallest candidate budget that reaches a target validation fidelity in 10 of 12 seeds?</a:t>
             </a:r>
           </a:p>
           <a:p>
@@ -4445,22 +4445,72 @@
               </a:spcAft>
             </a:pPr>
             <a:r>
-              <a:rPr sz="1150" b="1">
+              <a:rPr sz="1300" b="1">
                 <a:solidFill>
                   <a:srgbClr val="FBF4E6"/>
                 </a:solidFill>
                 <a:latin typeface="Arial"/>
               </a:rPr>
+              <a:t>Method:  </a:t>
+            </a:r>
+            <a:r>
+              <a:rPr sz="1300" b="0">
+                <a:solidFill>
+                  <a:srgbClr val="FFFFFF"/>
+                </a:solidFill>
+                <a:latin typeface="Arial"/>
+              </a:rPr>
+              <a:t>re-analysed 7 earlier conditions with no model calls, then ran 2 pre-registered boundary cells; judged on validation only.</a:t>
+            </a:r>
+          </a:p>
+          <a:p>
+            <a:pPr algn="l">
+              <a:spcAft>
+                <a:spcPts val="600"/>
+              </a:spcAft>
+            </a:pPr>
+            <a:r>
+              <a:rPr sz="1300" b="1">
+                <a:solidFill>
+                  <a:srgbClr val="FBF4E6"/>
+                </a:solidFill>
+                <a:latin typeface="Arial"/>
+              </a:rPr>
+              <a:t>Result:  </a:t>
+            </a:r>
+            <a:r>
+              <a:rPr sz="1300" b="0">
+                <a:solidFill>
+                  <a:srgbClr val="FFFFFF"/>
+                </a:solidFill>
+                <a:latin typeface="Arial"/>
+              </a:rPr>
+              <a:t>the open loop passes at budget 6 (12/12) where the closed loop fails (8/12); more budget did not rescue the XXZ cell (9/12 to 5/12).</a:t>
+            </a:r>
+          </a:p>
+          <a:p>
+            <a:pPr algn="l">
+              <a:spcAft>
+                <a:spcPts val="600"/>
+              </a:spcAft>
+            </a:pPr>
+            <a:r>
+              <a:rPr sz="1300" b="1">
+                <a:solidFill>
+                  <a:srgbClr val="FBF4E6"/>
+                </a:solidFill>
+                <a:latin typeface="Arial"/>
+              </a:rPr>
               <a:t>Not claimed:  </a:t>
             </a:r>
             <a:r>
-              <a:rPr sz="1150" b="0">
+              <a:rPr sz="1300" b="0">
                 <a:solidFill>
                   <a:srgbClr val="FFFFFF"/>
                 </a:solidFill>
                 <a:latin typeface="Arial"/>
               </a:rPr>
-              <a:t>no single minimum budget, no interval, and nothing about the held-out test set, which was never evaluated in this work.</a:t>
+              <a:t>no single minimum budget and no interval - the counts are not monotone; the test set was never evaluated.</a:t>
             </a:r>
           </a:p>
         </p:txBody>
@@ -4473,7 +4523,7 @@
         </p:nvSpPr>
         <p:spPr>
           <a:xfrm>
-            <a:off x="566928" y="5742431"/>
+            <a:off x="566928" y="5797296"/>
             <a:ext cx="7740487" cy="274320"/>
           </a:xfrm>
           <a:prstGeom prst="rect">
@@ -4493,7 +4543,7 @@
               </a:spcAft>
             </a:pPr>
             <a:r>
-              <a:rPr sz="1200" b="1" i="0">
+              <a:rPr sz="1350" b="1" i="0">
                 <a:solidFill>
                   <a:srgbClr val="FFFFFF"/>
                 </a:solidFill>
@@ -4512,7 +4562,7 @@
         </p:nvSpPr>
         <p:spPr>
           <a:xfrm>
-            <a:off x="566928" y="6016751"/>
+            <a:off x="566928" y="6071616"/>
             <a:ext cx="7740487" cy="457200"/>
           </a:xfrm>
           <a:prstGeom prst="rect">
@@ -4535,7 +4585,7 @@
               </a:spcAft>
             </a:pPr>
             <a:r>
-              <a:rPr sz="1050" b="0" i="0">
+              <a:rPr sz="1200" b="0" i="0">
                 <a:solidFill>
                   <a:srgbClr val="A9B7CE"/>
                 </a:solidFill>
@@ -4554,7 +4604,7 @@
         </p:nvSpPr>
         <p:spPr>
           <a:xfrm>
-            <a:off x="8307415" y="6016751"/>
+            <a:off x="8307415" y="6071616"/>
             <a:ext cx="3317351" cy="274320"/>
           </a:xfrm>
           <a:prstGeom prst="rect">
@@ -4574,7 +4624,7 @@
               </a:spcAft>
             </a:pPr>
             <a:r>
-              <a:rPr sz="1050" b="0" i="0">
+              <a:rPr sz="1200" b="0" i="0">
                 <a:solidFill>
                   <a:srgbClr val="A9B7CE"/>
                 </a:solidFill>
@@ -4655,8 +4705,8 @@
         </p:nvSpPr>
         <p:spPr>
           <a:xfrm>
-            <a:off x="566928" y="384048"/>
-            <a:ext cx="11057839" cy="237744"/>
+            <a:off x="566928" y="310896"/>
+            <a:ext cx="11057839" cy="219456"/>
           </a:xfrm>
           <a:prstGeom prst="rect">
             <a:avLst/>
@@ -4675,7 +4725,7 @@
               </a:spcAft>
             </a:pPr>
             <a:r>
-              <a:rPr sz="1000" b="1" i="0" spc="150">
+              <a:rPr sz="1100" b="1" i="0" spc="150">
                 <a:solidFill>
                   <a:srgbClr val="8C2F39"/>
                 </a:solidFill>
@@ -4694,8 +4744,8 @@
         </p:nvSpPr>
         <p:spPr>
           <a:xfrm>
-            <a:off x="566928" y="621792"/>
-            <a:ext cx="11057839" cy="530352"/>
+            <a:off x="566928" y="530352"/>
+            <a:ext cx="11057839" cy="566928"/>
           </a:xfrm>
           <a:prstGeom prst="rect">
             <a:avLst/>
@@ -4717,13 +4767,13 @@
               </a:spcAft>
             </a:pPr>
             <a:r>
-              <a:rPr sz="2500" b="1" i="0">
+              <a:rPr sz="2700" b="1" i="0">
                 <a:solidFill>
                   <a:srgbClr val="14213D"/>
                 </a:solidFill>
                 <a:latin typeface="Arial"/>
               </a:rPr>
-              <a:t>Spend more on resolution, or diagnose why 0.99 is out of reach</a:t>
+              <a:t>Sharpen the boundary, or diagnose the 0.99 ceiling</a:t>
             </a:r>
           </a:p>
         </p:txBody>
@@ -4736,7 +4786,7 @@
         </p:nvSpPr>
         <p:spPr>
           <a:xfrm>
-            <a:off x="566928" y="1170431"/>
+            <a:off x="566928" y="1115568"/>
             <a:ext cx="11057839" cy="310896"/>
           </a:xfrm>
           <a:prstGeom prst="rect">
@@ -4759,7 +4809,7 @@
               </a:spcAft>
             </a:pPr>
             <a:r>
-              <a:rPr sz="1250" b="0" i="0">
+              <a:rPr sz="1450" b="0" i="0">
                 <a:solidFill>
                   <a:srgbClr val="626E85"/>
                 </a:solidFill>
@@ -4778,7 +4828,7 @@
         </p:nvSpPr>
         <p:spPr>
           <a:xfrm>
-            <a:off x="566928" y="1591055"/>
+            <a:off x="566928" y="1499616"/>
             <a:ext cx="11057839" cy="10972"/>
           </a:xfrm>
           <a:prstGeom prst="rect">
@@ -4822,8 +4872,8 @@
         </p:nvSpPr>
         <p:spPr>
           <a:xfrm>
-            <a:off x="566928" y="1828799"/>
-            <a:ext cx="3527450" cy="3977639"/>
+            <a:off x="566928" y="1664208"/>
+            <a:ext cx="3527450" cy="4233722"/>
           </a:xfrm>
           <a:prstGeom prst="roundRect">
             <a:avLst>
@@ -4870,8 +4920,8 @@
         </p:nvSpPr>
         <p:spPr>
           <a:xfrm>
-            <a:off x="704088" y="1904237"/>
-            <a:ext cx="3253130" cy="274320"/>
+            <a:off x="731520" y="1754733"/>
+            <a:ext cx="3198266" cy="319786"/>
           </a:xfrm>
           <a:prstGeom prst="rect">
             <a:avLst/>
@@ -4890,7 +4940,7 @@
               </a:spcAft>
             </a:pPr>
             <a:r>
-              <a:rPr sz="1200" b="1" i="0">
+              <a:rPr sz="1450" b="1" i="0">
                 <a:solidFill>
                   <a:srgbClr val="245C42"/>
                 </a:solidFill>
@@ -4909,8 +4959,8 @@
         </p:nvSpPr>
         <p:spPr>
           <a:xfrm>
-            <a:off x="704088" y="2215133"/>
-            <a:ext cx="3253130" cy="3509010"/>
+            <a:off x="731520" y="2074519"/>
+            <a:ext cx="3198266" cy="3724656"/>
           </a:xfrm>
           <a:prstGeom prst="rect">
             <a:avLst/>
@@ -4932,7 +4982,7 @@
               </a:spcAft>
             </a:pPr>
             <a:r>
-              <a:rPr sz="1050" b="1" i="0">
+              <a:rPr sz="1300" b="1" i="0">
                 <a:solidFill>
                   <a:srgbClr val="3D4A63"/>
                 </a:solidFill>
@@ -4951,7 +5001,7 @@
               </a:spcAft>
             </a:pPr>
             <a:r>
-              <a:rPr sz="1050" b="0" i="0">
+              <a:rPr sz="1300" b="0" i="0">
                 <a:solidFill>
                   <a:srgbClr val="3D4A63"/>
                 </a:solidFill>
@@ -4970,7 +5020,7 @@
               </a:spcAft>
             </a:pPr>
             <a:r>
-              <a:rPr sz="1050" b="0" i="0">
+              <a:rPr sz="1300" b="0" i="0">
                 <a:solidFill>
                   <a:srgbClr val="3D4A63"/>
                 </a:solidFill>
@@ -4989,7 +5039,7 @@
               </a:spcAft>
             </a:pPr>
             <a:r>
-              <a:rPr sz="1050" b="0" i="0">
+              <a:rPr sz="1300" b="0" i="0">
                 <a:solidFill>
                   <a:srgbClr val="3D4A63"/>
                 </a:solidFill>
@@ -5008,8 +5058,8 @@
         </p:nvSpPr>
         <p:spPr>
           <a:xfrm>
-            <a:off x="4332122" y="1828799"/>
-            <a:ext cx="3527450" cy="3977639"/>
+            <a:off x="4332122" y="1664208"/>
+            <a:ext cx="3527450" cy="4233722"/>
           </a:xfrm>
           <a:prstGeom prst="roundRect">
             <a:avLst>
@@ -5056,8 +5106,8 @@
         </p:nvSpPr>
         <p:spPr>
           <a:xfrm>
-            <a:off x="4469282" y="1904237"/>
-            <a:ext cx="3253130" cy="274320"/>
+            <a:off x="4496714" y="1754733"/>
+            <a:ext cx="3198266" cy="319786"/>
           </a:xfrm>
           <a:prstGeom prst="rect">
             <a:avLst/>
@@ -5076,7 +5126,7 @@
               </a:spcAft>
             </a:pPr>
             <a:r>
-              <a:rPr sz="1200" b="1" i="0">
+              <a:rPr sz="1450" b="1" i="0">
                 <a:solidFill>
                   <a:srgbClr val="86302B"/>
                 </a:solidFill>
@@ -5095,8 +5145,8 @@
         </p:nvSpPr>
         <p:spPr>
           <a:xfrm>
-            <a:off x="4469282" y="2215133"/>
-            <a:ext cx="3253130" cy="3509010"/>
+            <a:off x="4496714" y="2074519"/>
+            <a:ext cx="3198266" cy="3724656"/>
           </a:xfrm>
           <a:prstGeom prst="rect">
             <a:avLst/>
@@ -5118,13 +5168,13 @@
               </a:spcAft>
             </a:pPr>
             <a:r>
-              <a:rPr sz="1050" b="1" i="0">
+              <a:rPr sz="1300" b="1" i="0">
                 <a:solidFill>
                   <a:srgbClr val="3D4A63"/>
                 </a:solidFill>
                 <a:latin typeface="Arial"/>
               </a:rPr>
-              <a:t>•  D1  Is the budget boundary worth more spend?</a:t>
+              <a:t>•  D1  Sharpen the budget boundary?</a:t>
             </a:r>
           </a:p>
           <a:p>
@@ -5137,13 +5187,13 @@
               </a:spcAft>
             </a:pPr>
             <a:r>
-              <a:rPr sz="950" b="0" i="0">
+              <a:rPr sz="1200" b="0" i="0">
                 <a:solidFill>
                   <a:srgbClr val="626E85"/>
                 </a:solidFill>
                 <a:latin typeface="Arial"/>
               </a:rPr>
-              <a:t>–  (a) repeat both cells with fresh generation seeds - turns a knife-edge count into a distribution</a:t>
+              <a:t>–  (a) repeat both cells with fresh generation seeds</a:t>
             </a:r>
           </a:p>
           <a:p>
@@ -5156,13 +5206,13 @@
               </a:spcAft>
             </a:pPr>
             <a:r>
-              <a:rPr sz="950" b="0" i="0">
+              <a:rPr sz="1200" b="0" i="0">
                 <a:solidFill>
                   <a:srgbClr val="626E85"/>
                 </a:solidFill>
                 <a:latin typeface="Arial"/>
               </a:rPr>
-              <a:t>–  (b) stop refining; treat budget 6 open-loop as the working answer - free, but rests on one run</a:t>
+              <a:t>–  (b) accept budget 6 open-loop as the answer</a:t>
             </a:r>
           </a:p>
           <a:p>
@@ -5175,13 +5225,13 @@
               </a:spcAft>
             </a:pPr>
             <a:r>
-              <a:rPr sz="950" b="0" i="0">
+              <a:rPr sz="1200" b="0" i="0">
                 <a:solidFill>
                   <a:srgbClr val="626E85"/>
                 </a:solidFill>
                 <a:latin typeface="Arial"/>
               </a:rPr>
-              <a:t>–  Recommended (a), Ising cell only; moderate confidence.</a:t>
+              <a:t>–  Recommend (a), Ising only; moderate.</a:t>
             </a:r>
           </a:p>
           <a:p>
@@ -5194,13 +5244,13 @@
               </a:spcAft>
             </a:pPr>
             <a:r>
-              <a:rPr sz="1050" b="1" i="0">
+              <a:rPr sz="1300" b="1" i="0">
                 <a:solidFill>
                   <a:srgbClr val="3D4A63"/>
                 </a:solidFill>
                 <a:latin typeface="Arial"/>
               </a:rPr>
-              <a:t>•  D2  What to do about the 0.99 target</a:t>
+              <a:t>•  D2  What to do about 0.99</a:t>
             </a:r>
           </a:p>
           <a:p>
@@ -5213,13 +5263,13 @@
               </a:spcAft>
             </a:pPr>
             <a:r>
-              <a:rPr sz="950" b="0" i="0">
+              <a:rPr sz="1200" b="0" i="0">
                 <a:solidFill>
                   <a:srgbClr val="626E85"/>
                 </a:solidFill>
                 <a:latin typeface="Arial"/>
               </a:rPr>
-              <a:t>–  (a) diagnose circuit capacity and training length instead of search</a:t>
+              <a:t>–  (a) diagnose capacity and training length</a:t>
             </a:r>
           </a:p>
           <a:p>
@@ -5232,7 +5282,7 @@
               </a:spcAft>
             </a:pPr>
             <a:r>
-              <a:rPr sz="950" b="0" i="0">
+              <a:rPr sz="1200" b="0" i="0">
                 <a:solidFill>
                   <a:srgbClr val="626E85"/>
                 </a:solidFill>
@@ -5251,13 +5301,13 @@
               </a:spcAft>
             </a:pPr>
             <a:r>
-              <a:rPr sz="950" b="0" i="0">
+              <a:rPr sz="1200" b="0" i="0">
                 <a:solidFill>
                   <a:srgbClr val="626E85"/>
                 </a:solidFill>
                 <a:latin typeface="Arial"/>
               </a:rPr>
-              <a:t>–  Recommended (a), moderate confidence; a budget sweep cannot separate the causes.</a:t>
+              <a:t>–  Recommend (a); a sweep cannot separate the causes.</a:t>
             </a:r>
           </a:p>
           <a:p>
@@ -5270,32 +5320,13 @@
               </a:spcAft>
             </a:pPr>
             <a:r>
-              <a:rPr sz="1050" b="1" i="0">
+              <a:rPr sz="1300" b="1" i="0">
                 <a:solidFill>
                   <a:srgbClr val="3D4A63"/>
                 </a:solidFill>
                 <a:latin typeface="Arial"/>
               </a:rPr>
-              <a:t>•  D3  Any confirmatory read of held-out data</a:t>
-            </a:r>
-          </a:p>
-          <a:p>
-            <a:pPr algn="l" marL="420623" indent="-219456">
-              <a:lnSpc>
-                <a:spcPct val="105000"/>
-              </a:lnSpc>
-              <a:spcAft>
-                <a:spcPts val="500"/>
-              </a:spcAft>
-            </a:pPr>
-            <a:r>
-              <a:rPr sz="950" b="0" i="0">
-                <a:solidFill>
-                  <a:srgbClr val="626E85"/>
-                </a:solidFill>
-                <a:latin typeface="Arial"/>
-              </a:rPr>
-              <a:t>–  Recommended: not yet, high confidence.</a:t>
+              <a:t>•  D3  Read held-out data yet? Recommend not yet; high confidence.</a:t>
             </a:r>
           </a:p>
         </p:txBody>
@@ -5308,8 +5339,8 @@
         </p:nvSpPr>
         <p:spPr>
           <a:xfrm>
-            <a:off x="8097316" y="1828799"/>
-            <a:ext cx="3527450" cy="3977639"/>
+            <a:off x="8097316" y="1664208"/>
+            <a:ext cx="3527450" cy="4233722"/>
           </a:xfrm>
           <a:prstGeom prst="roundRect">
             <a:avLst>
@@ -5356,8 +5387,8 @@
         </p:nvSpPr>
         <p:spPr>
           <a:xfrm>
-            <a:off x="8234476" y="1904237"/>
-            <a:ext cx="3253130" cy="274320"/>
+            <a:off x="8261908" y="1754733"/>
+            <a:ext cx="3198266" cy="319786"/>
           </a:xfrm>
           <a:prstGeom prst="rect">
             <a:avLst/>
@@ -5376,7 +5407,7 @@
               </a:spcAft>
             </a:pPr>
             <a:r>
-              <a:rPr sz="1200" b="1" i="0">
+              <a:rPr sz="1450" b="1" i="0">
                 <a:solidFill>
                   <a:srgbClr val="1F4E79"/>
                 </a:solidFill>
@@ -5395,8 +5426,8 @@
         </p:nvSpPr>
         <p:spPr>
           <a:xfrm>
-            <a:off x="8234476" y="2215133"/>
-            <a:ext cx="3253130" cy="3509010"/>
+            <a:off x="8261908" y="2074519"/>
+            <a:ext cx="3198266" cy="3724656"/>
           </a:xfrm>
           <a:prstGeom prst="rect">
             <a:avLst/>
@@ -5418,13 +5449,13 @@
               </a:spcAft>
             </a:pPr>
             <a:r>
-              <a:rPr sz="1050" b="1" i="0">
+              <a:rPr sz="1300" b="1" i="0">
                 <a:solidFill>
                   <a:srgbClr val="3D4A63"/>
                 </a:solidFill>
                 <a:latin typeface="Arial"/>
               </a:rPr>
-              <a:t>•  On D1(a): repeat the Ising budget-6 cell with fresh generation seeds; report both runs together.</a:t>
+              <a:t>•  On D1(a): repeat the Ising budget-6 cell with fresh generation seeds.</a:t>
             </a:r>
           </a:p>
           <a:p>
@@ -5437,13 +5468,13 @@
               </a:spcAft>
             </a:pPr>
             <a:r>
-              <a:rPr sz="1050" b="0" i="0">
+              <a:rPr sz="1300" b="0" i="0">
                 <a:solidFill>
                   <a:srgbClr val="3D4A63"/>
                 </a:solidFill>
                 <a:latin typeface="Arial"/>
               </a:rPr>
-              <a:t>•  On D2(a): write the capacity-versus-search protocol and its cost cap, then stop for review.</a:t>
+              <a:t>•  On D2(a): write the capacity-versus-search protocol and its cap, then stop.</a:t>
             </a:r>
           </a:p>
           <a:p>
@@ -5456,13 +5487,13 @@
               </a:spcAft>
             </a:pPr>
             <a:r>
-              <a:rPr sz="1050" b="0" i="0">
+              <a:rPr sz="1300" b="0" i="0">
                 <a:solidFill>
                   <a:srgbClr val="3D4A63"/>
                 </a:solidFill>
                 <a:latin typeface="Arial"/>
               </a:rPr>
-              <a:t>•  A yes to either commits to a new protocol document and a new cost cap before anything runs.</a:t>
+              <a:t>•  Either yes commits to a new protocol and cap before anything runs.</a:t>
             </a:r>
           </a:p>
           <a:p>
@@ -5475,13 +5506,13 @@
               </a:spcAft>
             </a:pPr>
             <a:r>
-              <a:rPr sz="1050" b="0" i="0">
+              <a:rPr sz="1300" b="0" i="0">
                 <a:solidFill>
                   <a:srgbClr val="3D4A63"/>
                 </a:solidFill>
                 <a:latin typeface="Arial"/>
               </a:rPr>
-              <a:t>•  Already committed: report, raw logs with hashes, and the reproduction commands.</a:t>
+              <a:t>•  Already committed: report, hashed logs, reproduction commands.</a:t>
             </a:r>
           </a:p>
         </p:txBody>
@@ -5494,8 +5525,8 @@
         </p:nvSpPr>
         <p:spPr>
           <a:xfrm>
-            <a:off x="566928" y="5980175"/>
-            <a:ext cx="11057839" cy="329184"/>
+            <a:off x="566928" y="6089904"/>
+            <a:ext cx="11057839" cy="292608"/>
           </a:xfrm>
           <a:prstGeom prst="rect">
             <a:avLst/>
@@ -5517,7 +5548,7 @@
               </a:spcAft>
             </a:pPr>
             <a:r>
-              <a:rPr sz="850" b="0" i="0">
+              <a:rPr sz="1050" b="0" i="0">
                 <a:solidFill>
                   <a:srgbClr val="929BAC"/>
                 </a:solidFill>
@@ -5536,8 +5567,8 @@
         </p:nvSpPr>
         <p:spPr>
           <a:xfrm>
-            <a:off x="566928" y="6309359"/>
-            <a:ext cx="9399163" cy="219456"/>
+            <a:off x="566928" y="6382512"/>
+            <a:ext cx="9399163" cy="201168"/>
           </a:xfrm>
           <a:prstGeom prst="rect">
             <a:avLst/>
@@ -5556,7 +5587,7 @@
               </a:spcAft>
             </a:pPr>
             <a:r>
-              <a:rPr sz="850" b="0" i="0">
+              <a:rPr sz="950" b="0" i="0">
                 <a:solidFill>
                   <a:srgbClr val="929BAC"/>
                 </a:solidFill>
@@ -5575,8 +5606,8 @@
         </p:nvSpPr>
         <p:spPr>
           <a:xfrm>
-            <a:off x="9966091" y="6309359"/>
-            <a:ext cx="1658675" cy="219456"/>
+            <a:off x="9966091" y="6382512"/>
+            <a:ext cx="1658675" cy="201168"/>
           </a:xfrm>
           <a:prstGeom prst="rect">
             <a:avLst/>
@@ -5595,7 +5626,7 @@
               </a:spcAft>
             </a:pPr>
             <a:r>
-              <a:rPr sz="850" b="0" i="0">
+              <a:rPr sz="950" b="0" i="0">
                 <a:solidFill>
                   <a:srgbClr val="929BAC"/>
                 </a:solidFill>
@@ -5676,8 +5707,8 @@
         </p:nvSpPr>
         <p:spPr>
           <a:xfrm>
-            <a:off x="566928" y="384048"/>
-            <a:ext cx="11057839" cy="237744"/>
+            <a:off x="566928" y="310896"/>
+            <a:ext cx="11057839" cy="219456"/>
           </a:xfrm>
           <a:prstGeom prst="rect">
             <a:avLst/>
@@ -5696,13 +5727,13 @@
               </a:spcAft>
             </a:pPr>
             <a:r>
-              <a:rPr sz="1000" b="1" i="0" spc="150">
+              <a:rPr sz="1100" b="1" i="0" spc="150">
                 <a:solidFill>
                   <a:srgbClr val="8C2F39"/>
                 </a:solidFill>
                 <a:latin typeface="Arial"/>
               </a:rPr>
-              <a:t>1 · QUESTION AND CLAIM</a:t>
+              <a:t>1 · WHY THIS, AND WHAT IS BEING VERIFIED</a:t>
             </a:r>
           </a:p>
         </p:txBody>
@@ -5715,8 +5746,8 @@
         </p:nvSpPr>
         <p:spPr>
           <a:xfrm>
-            <a:off x="566928" y="621792"/>
-            <a:ext cx="11057839" cy="530352"/>
+            <a:off x="566928" y="530352"/>
+            <a:ext cx="11057839" cy="566928"/>
           </a:xfrm>
           <a:prstGeom prst="rect">
             <a:avLst/>
@@ -5738,13 +5769,13 @@
               </a:spcAft>
             </a:pPr>
             <a:r>
-              <a:rPr sz="2500" b="1" i="0">
+              <a:rPr sz="2700" b="1" i="0">
                 <a:solidFill>
                   <a:srgbClr val="14213D"/>
                 </a:solidFill>
                 <a:latin typeface="Arial"/>
               </a:rPr>
-              <a:t>What budget reaches a required accuracy, not which method wins</a:t>
+              <a:t>What budget a required accuracy needs, not who wins</a:t>
             </a:r>
           </a:p>
         </p:txBody>
@@ -5757,7 +5788,7 @@
         </p:nvSpPr>
         <p:spPr>
           <a:xfrm>
-            <a:off x="566928" y="1170431"/>
+            <a:off x="566928" y="1115568"/>
             <a:ext cx="11057839" cy="310896"/>
           </a:xfrm>
           <a:prstGeom prst="rect">
@@ -5780,7 +5811,7 @@
               </a:spcAft>
             </a:pPr>
             <a:r>
-              <a:rPr sz="1250" b="0" i="0">
+              <a:rPr sz="1450" b="0" i="0">
                 <a:solidFill>
                   <a:srgbClr val="626E85"/>
                 </a:solidFill>
@@ -5799,7 +5830,7 @@
         </p:nvSpPr>
         <p:spPr>
           <a:xfrm>
-            <a:off x="566928" y="1591055"/>
+            <a:off x="566928" y="1499616"/>
             <a:ext cx="11057839" cy="10972"/>
           </a:xfrm>
           <a:prstGeom prst="rect">
@@ -5843,7 +5874,7 @@
         </p:nvSpPr>
         <p:spPr>
           <a:xfrm>
-            <a:off x="566928" y="1828799"/>
+            <a:off x="566928" y="1664208"/>
             <a:ext cx="11057839" cy="1325880"/>
           </a:xfrm>
           <a:prstGeom prst="roundRect">
@@ -5889,7 +5920,7 @@
         </p:nvSpPr>
         <p:spPr>
           <a:xfrm>
-            <a:off x="566928" y="1828799"/>
+            <a:off x="566928" y="1664208"/>
             <a:ext cx="45720" cy="1325880"/>
           </a:xfrm>
           <a:prstGeom prst="rect">
@@ -5933,7 +5964,7 @@
         </p:nvSpPr>
         <p:spPr>
           <a:xfrm>
-            <a:off x="950976" y="1828799"/>
+            <a:off x="950976" y="1664208"/>
             <a:ext cx="10289743" cy="1325880"/>
           </a:xfrm>
           <a:prstGeom prst="rect">
@@ -5956,7 +5987,7 @@
               </a:spcAft>
             </a:pPr>
             <a:r>
-              <a:rPr sz="1900" b="0" i="0">
+              <a:rPr sz="2300" b="0" i="0">
                 <a:solidFill>
                   <a:srgbClr val="14213D"/>
                 </a:solidFill>
@@ -5975,8 +6006,8 @@
         </p:nvSpPr>
         <p:spPr>
           <a:xfrm>
-            <a:off x="566928" y="3392424"/>
-            <a:ext cx="11057839" cy="1728215"/>
+            <a:off x="566928" y="3227832"/>
+            <a:ext cx="11057839" cy="2075688"/>
           </a:xfrm>
           <a:prstGeom prst="rect">
             <a:avLst/>
@@ -5998,7 +6029,7 @@
               </a:spcAft>
             </a:pPr>
             <a:r>
-              <a:rPr sz="1150" b="1" i="0">
+              <a:rPr sz="1400" b="1" i="0">
                 <a:solidFill>
                   <a:srgbClr val="3D4A63"/>
                 </a:solidFill>
@@ -6017,7 +6048,7 @@
               </a:spcAft>
             </a:pPr>
             <a:r>
-              <a:rPr sz="1150" b="0" i="0">
+              <a:rPr sz="1400" b="0" i="0">
                 <a:solidFill>
                   <a:srgbClr val="3D4A63"/>
                 </a:solidFill>
@@ -6036,7 +6067,7 @@
               </a:spcAft>
             </a:pPr>
             <a:r>
-              <a:rPr sz="1150" b="0" i="0">
+              <a:rPr sz="1400" b="0" i="0">
                 <a:solidFill>
                   <a:srgbClr val="3D4A63"/>
                 </a:solidFill>
@@ -6055,7 +6086,7 @@
               </a:spcAft>
             </a:pPr>
             <a:r>
-              <a:rPr sz="1150" b="0" i="0">
+              <a:rPr sz="1400" b="0" i="0">
                 <a:solidFill>
                   <a:srgbClr val="3D4A63"/>
                 </a:solidFill>
@@ -6074,7 +6105,7 @@
         </p:nvSpPr>
         <p:spPr>
           <a:xfrm>
-            <a:off x="566928" y="5193792"/>
+            <a:off x="566928" y="5340096"/>
             <a:ext cx="11057839" cy="530352"/>
           </a:xfrm>
           <a:prstGeom prst="rect">
@@ -6118,7 +6149,7 @@
         </p:nvSpPr>
         <p:spPr>
           <a:xfrm>
-            <a:off x="566928" y="5193792"/>
+            <a:off x="566928" y="5340096"/>
             <a:ext cx="45720" cy="530352"/>
           </a:xfrm>
           <a:prstGeom prst="rect">
@@ -6162,7 +6193,7 @@
         </p:nvSpPr>
         <p:spPr>
           <a:xfrm>
-            <a:off x="749808" y="5193792"/>
+            <a:off x="749808" y="5340096"/>
             <a:ext cx="10746943" cy="530352"/>
           </a:xfrm>
           <a:prstGeom prst="rect">
@@ -6185,7 +6216,7 @@
               </a:spcAft>
             </a:pPr>
             <a:r>
-              <a:rPr sz="1200" b="1" i="0">
+              <a:rPr sz="1450" b="1" i="0">
                 <a:solidFill>
                   <a:srgbClr val="14213D"/>
                 </a:solidFill>
@@ -6204,8 +6235,8 @@
         </p:nvSpPr>
         <p:spPr>
           <a:xfrm>
-            <a:off x="566928" y="5852159"/>
-            <a:ext cx="45720" cy="329184"/>
+            <a:off x="566928" y="5971032"/>
+            <a:ext cx="45720" cy="310896"/>
           </a:xfrm>
           <a:prstGeom prst="rect">
             <a:avLst/>
@@ -6248,8 +6279,8 @@
         </p:nvSpPr>
         <p:spPr>
           <a:xfrm>
-            <a:off x="713232" y="5824727"/>
-            <a:ext cx="10911535" cy="384048"/>
+            <a:off x="713232" y="5943600"/>
+            <a:ext cx="10911535" cy="365760"/>
           </a:xfrm>
           <a:prstGeom prst="rect">
             <a:avLst/>
@@ -6268,7 +6299,7 @@
               </a:spcAft>
             </a:pPr>
             <a:r>
-              <a:rPr sz="1150" b="1">
+              <a:rPr sz="1400" b="1">
                 <a:solidFill>
                   <a:srgbClr val="8C2F39"/>
                 </a:solidFill>
@@ -6277,7 +6308,7 @@
               <a:t>Next:  </a:t>
             </a:r>
             <a:r>
-              <a:rPr sz="1150" b="0">
+              <a:rPr sz="1400" b="0">
                 <a:solidFill>
                   <a:srgbClr val="3D4A63"/>
                 </a:solidFill>
@@ -6296,8 +6327,8 @@
         </p:nvSpPr>
         <p:spPr>
           <a:xfrm>
-            <a:off x="566928" y="6309359"/>
-            <a:ext cx="9399163" cy="219456"/>
+            <a:off x="566928" y="6382512"/>
+            <a:ext cx="9399163" cy="201168"/>
           </a:xfrm>
           <a:prstGeom prst="rect">
             <a:avLst/>
@@ -6316,7 +6347,7 @@
               </a:spcAft>
             </a:pPr>
             <a:r>
-              <a:rPr sz="850" b="0" i="0">
+              <a:rPr sz="950" b="0" i="0">
                 <a:solidFill>
                   <a:srgbClr val="929BAC"/>
                 </a:solidFill>
@@ -6335,8 +6366,8 @@
         </p:nvSpPr>
         <p:spPr>
           <a:xfrm>
-            <a:off x="9966091" y="6309359"/>
-            <a:ext cx="1658675" cy="219456"/>
+            <a:off x="9966091" y="6382512"/>
+            <a:ext cx="1658675" cy="201168"/>
           </a:xfrm>
           <a:prstGeom prst="rect">
             <a:avLst/>
@@ -6355,7 +6386,7 @@
               </a:spcAft>
             </a:pPr>
             <a:r>
-              <a:rPr sz="850" b="0" i="0">
+              <a:rPr sz="950" b="0" i="0">
                 <a:solidFill>
                   <a:srgbClr val="929BAC"/>
                 </a:solidFill>
@@ -6436,8 +6467,8 @@
         </p:nvSpPr>
         <p:spPr>
           <a:xfrm>
-            <a:off x="566928" y="384048"/>
-            <a:ext cx="11057839" cy="237744"/>
+            <a:off x="566928" y="310896"/>
+            <a:ext cx="11057839" cy="219456"/>
           </a:xfrm>
           <a:prstGeom prst="rect">
             <a:avLst/>
@@ -6456,13 +6487,13 @@
               </a:spcAft>
             </a:pPr>
             <a:r>
-              <a:rPr sz="1000" b="1" i="0" spc="150">
+              <a:rPr sz="1100" b="1" i="0" spc="150">
                 <a:solidFill>
                   <a:srgbClr val="8C2F39"/>
                 </a:solidFill>
                 <a:latin typeface="Arial"/>
               </a:rPr>
-              <a:t>2 · PRIOR WORK AND GAP</a:t>
+              <a:t>2 · BACKGROUND: WHAT WAS ALREADY KNOWN</a:t>
             </a:r>
           </a:p>
         </p:txBody>
@@ -6475,8 +6506,8 @@
         </p:nvSpPr>
         <p:spPr>
           <a:xfrm>
-            <a:off x="566928" y="621792"/>
-            <a:ext cx="11057839" cy="530352"/>
+            <a:off x="566928" y="530352"/>
+            <a:ext cx="11057839" cy="566928"/>
           </a:xfrm>
           <a:prstGeom prst="rect">
             <a:avLst/>
@@ -6498,13 +6529,13 @@
               </a:spcAft>
             </a:pPr>
             <a:r>
-              <a:rPr sz="2500" b="1" i="0">
+              <a:rPr sz="2700" b="1" i="0">
                 <a:solidFill>
                   <a:srgbClr val="14213D"/>
                 </a:solidFill>
                 <a:latin typeface="Arial"/>
               </a:rPr>
-              <a:t>Settled: semantics helps. Unsettled: how much search it needs</a:t>
+              <a:t>Settled: semantics helps. Open: how much search</a:t>
             </a:r>
           </a:p>
         </p:txBody>
@@ -6517,7 +6548,7 @@
         </p:nvSpPr>
         <p:spPr>
           <a:xfrm>
-            <a:off x="566928" y="1170431"/>
+            <a:off x="566928" y="1115568"/>
             <a:ext cx="11057839" cy="310896"/>
           </a:xfrm>
           <a:prstGeom prst="rect">
@@ -6540,7 +6571,7 @@
               </a:spcAft>
             </a:pPr>
             <a:r>
-              <a:rPr sz="1250" b="0" i="0">
+              <a:rPr sz="1450" b="0" i="0">
                 <a:solidFill>
                   <a:srgbClr val="626E85"/>
                 </a:solidFill>
@@ -6559,7 +6590,7 @@
         </p:nvSpPr>
         <p:spPr>
           <a:xfrm>
-            <a:off x="566928" y="1591055"/>
+            <a:off x="566928" y="1499616"/>
             <a:ext cx="11057839" cy="10972"/>
           </a:xfrm>
           <a:prstGeom prst="rect">
@@ -6603,8 +6634,8 @@
         </p:nvSpPr>
         <p:spPr>
           <a:xfrm>
-            <a:off x="566928" y="1828799"/>
-            <a:ext cx="2586151" cy="1656334"/>
+            <a:off x="566928" y="1664208"/>
+            <a:ext cx="2586151" cy="3733678"/>
           </a:xfrm>
           <a:prstGeom prst="roundRect">
             <a:avLst>
@@ -6651,8 +6682,8 @@
         </p:nvSpPr>
         <p:spPr>
           <a:xfrm>
-            <a:off x="704088" y="1904237"/>
-            <a:ext cx="2311831" cy="274320"/>
+            <a:off x="731520" y="1754733"/>
+            <a:ext cx="2256967" cy="319786"/>
           </a:xfrm>
           <a:prstGeom prst="rect">
             <a:avLst/>
@@ -6671,13 +6702,13 @@
               </a:spcAft>
             </a:pPr>
             <a:r>
-              <a:rPr sz="1200" b="1" i="0">
+              <a:rPr sz="1450" b="1" i="0">
                 <a:solidFill>
                   <a:srgbClr val="245C42"/>
                 </a:solidFill>
                 <a:latin typeface="Arial"/>
               </a:rPr>
-              <a:t>Settled (CONFIRMED, measured)</a:t>
+              <a:t>Settled (measured)</a:t>
             </a:r>
           </a:p>
         </p:txBody>
@@ -6690,8 +6721,8 @@
         </p:nvSpPr>
         <p:spPr>
           <a:xfrm>
-            <a:off x="704088" y="2215133"/>
-            <a:ext cx="2311831" cy="1187704"/>
+            <a:off x="731520" y="2074519"/>
+            <a:ext cx="2256967" cy="3224611"/>
           </a:xfrm>
           <a:prstGeom prst="rect">
             <a:avLst/>
@@ -6713,13 +6744,13 @@
               </a:spcAft>
             </a:pPr>
             <a:r>
-              <a:rPr sz="1050" b="0" i="0">
+              <a:rPr sz="1300" b="0" i="0">
                 <a:solidFill>
                   <a:srgbClr val="3D4A63"/>
                 </a:solidFill>
                 <a:latin typeface="Arial"/>
               </a:rPr>
-              <a:t>•  Physics-informed proposals beat non-semantic search in all seven previously tested conditions.</a:t>
+              <a:t>•  Beat non-semantic search in all seven tested conditions.</a:t>
             </a:r>
           </a:p>
           <a:p>
@@ -6732,13 +6763,13 @@
               </a:spcAft>
             </a:pPr>
             <a:r>
-              <a:rPr sz="1050" b="0" i="0">
+              <a:rPr sz="1300" b="0" i="0">
                 <a:solidFill>
                   <a:srgbClr val="3D4A63"/>
                 </a:solidFill>
                 <a:latin typeface="Arial"/>
               </a:rPr>
-              <a:t>•  The result survives changes of budget, width, Hamiltonian and model.</a:t>
+              <a:t>•  Survives changes of budget, width, Hamiltonian and model.</a:t>
             </a:r>
           </a:p>
         </p:txBody>
@@ -6751,8 +6782,8 @@
         </p:nvSpPr>
         <p:spPr>
           <a:xfrm>
-            <a:off x="3390823" y="1828799"/>
-            <a:ext cx="2586151" cy="1656334"/>
+            <a:off x="3390823" y="1664208"/>
+            <a:ext cx="2586151" cy="3733678"/>
           </a:xfrm>
           <a:prstGeom prst="roundRect">
             <a:avLst>
@@ -6799,8 +6830,8 @@
         </p:nvSpPr>
         <p:spPr>
           <a:xfrm>
-            <a:off x="3527983" y="1904237"/>
-            <a:ext cx="2311831" cy="274320"/>
+            <a:off x="3555415" y="1754733"/>
+            <a:ext cx="2256967" cy="548132"/>
           </a:xfrm>
           <a:prstGeom prst="rect">
             <a:avLst/>
@@ -6819,13 +6850,13 @@
               </a:spcAft>
             </a:pPr>
             <a:r>
-              <a:rPr sz="1200" b="1" i="0">
+              <a:rPr sz="1450" b="1" i="0">
                 <a:solidFill>
                   <a:srgbClr val="4A5568"/>
                 </a:solidFill>
                 <a:latin typeface="Arial"/>
               </a:rPr>
-              <a:t>Already shown fragile (measured)</a:t>
+              <a:t>Shown fragile (measured)</a:t>
             </a:r>
           </a:p>
         </p:txBody>
@@ -6838,8 +6869,8 @@
         </p:nvSpPr>
         <p:spPr>
           <a:xfrm>
-            <a:off x="3527983" y="2215133"/>
-            <a:ext cx="2311831" cy="1187704"/>
+            <a:off x="3555415" y="2302865"/>
+            <a:ext cx="2256967" cy="2996265"/>
           </a:xfrm>
           <a:prstGeom prst="rect">
             <a:avLst/>
@@ -6861,13 +6892,13 @@
               </a:spcAft>
             </a:pPr>
             <a:r>
-              <a:rPr sz="1050" b="0" i="0">
+              <a:rPr sz="1300" b="0" i="0">
                 <a:solidFill>
                   <a:srgbClr val="3D4A63"/>
                 </a:solidFill>
                 <a:latin typeface="Arial"/>
               </a:rPr>
-              <a:t>•  The extra gain from a closed feedback loop is not general; it changes with every factor tested.</a:t>
+              <a:t>•  The closed-loop bonus is not general; it moves with every factor tested.</a:t>
             </a:r>
           </a:p>
           <a:p>
@@ -6880,13 +6911,13 @@
               </a:spcAft>
             </a:pPr>
             <a:r>
-              <a:rPr sz="1050" b="0" i="0">
+              <a:rPr sz="1300" b="0" i="0">
                 <a:solidFill>
                   <a:srgbClr val="3D4A63"/>
                 </a:solidFill>
                 <a:latin typeface="Arial"/>
               </a:rPr>
-              <a:t>•  Invalid proposals become random draws, entangling validity with architecture quality.</a:t>
+              <a:t>•  Invalid proposals become random draws.</a:t>
             </a:r>
           </a:p>
         </p:txBody>
@@ -6899,8 +6930,8 @@
         </p:nvSpPr>
         <p:spPr>
           <a:xfrm>
-            <a:off x="6214719" y="1828799"/>
-            <a:ext cx="2586151" cy="1656334"/>
+            <a:off x="6214719" y="1664208"/>
+            <a:ext cx="2586151" cy="3733678"/>
           </a:xfrm>
           <a:prstGeom prst="roundRect">
             <a:avLst>
@@ -6947,8 +6978,8 @@
         </p:nvSpPr>
         <p:spPr>
           <a:xfrm>
-            <a:off x="6351879" y="1904237"/>
-            <a:ext cx="2311831" cy="274320"/>
+            <a:off x="6379311" y="1754733"/>
+            <a:ext cx="2256967" cy="548132"/>
           </a:xfrm>
           <a:prstGeom prst="rect">
             <a:avLst/>
@@ -6967,7 +6998,7 @@
               </a:spcAft>
             </a:pPr>
             <a:r>
-              <a:rPr sz="1200" b="1" i="0">
+              <a:rPr sz="1450" b="1" i="0">
                 <a:solidFill>
                   <a:srgbClr val="1F4E79"/>
                 </a:solidFill>
@@ -6986,8 +7017,8 @@
         </p:nvSpPr>
         <p:spPr>
           <a:xfrm>
-            <a:off x="6351879" y="2215133"/>
-            <a:ext cx="2311831" cy="1187704"/>
+            <a:off x="6379311" y="2302865"/>
+            <a:ext cx="2256967" cy="2996265"/>
           </a:xfrm>
           <a:prstGeom prst="rect">
             <a:avLst/>
@@ -7009,7 +7040,7 @@
               </a:spcAft>
             </a:pPr>
             <a:r>
-              <a:rPr sz="1050" b="0" i="0">
+              <a:rPr sz="1300" b="0" i="0">
                 <a:solidFill>
                   <a:srgbClr val="3D4A63"/>
                 </a:solidFill>
@@ -7028,13 +7059,13 @@
               </a:spcAft>
             </a:pPr>
             <a:r>
-              <a:rPr sz="1050" b="0" i="0">
+              <a:rPr sz="1300" b="0" i="0">
                 <a:solidFill>
                   <a:srgbClr val="3D4A63"/>
                 </a:solidFill>
                 <a:latin typeface="Arial"/>
               </a:rPr>
-              <a:t>•  One cell sat exactly one seed short of the rule and had never been retried at a larger budget.</a:t>
+              <a:t>•  One cell sat one seed short and was never retried at a larger budget.</a:t>
             </a:r>
           </a:p>
         </p:txBody>
@@ -7047,8 +7078,8 @@
         </p:nvSpPr>
         <p:spPr>
           <a:xfrm>
-            <a:off x="9038615" y="1828799"/>
-            <a:ext cx="2586151" cy="1656334"/>
+            <a:off x="9038615" y="1664208"/>
+            <a:ext cx="2586151" cy="3733678"/>
           </a:xfrm>
           <a:prstGeom prst="roundRect">
             <a:avLst>
@@ -7095,8 +7126,8 @@
         </p:nvSpPr>
         <p:spPr>
           <a:xfrm>
-            <a:off x="9175775" y="1904237"/>
-            <a:ext cx="2311831" cy="274320"/>
+            <a:off x="9203207" y="1754733"/>
+            <a:ext cx="2256967" cy="319786"/>
           </a:xfrm>
           <a:prstGeom prst="rect">
             <a:avLst/>
@@ -7115,7 +7146,7 @@
               </a:spcAft>
             </a:pPr>
             <a:r>
-              <a:rPr sz="1200" b="1" i="0">
+              <a:rPr sz="1450" b="1" i="0">
                 <a:solidFill>
                   <a:srgbClr val="7A5A15"/>
                 </a:solidFill>
@@ -7134,8 +7165,8 @@
         </p:nvSpPr>
         <p:spPr>
           <a:xfrm>
-            <a:off x="9175775" y="2215133"/>
-            <a:ext cx="2311831" cy="1187704"/>
+            <a:off x="9203207" y="2074519"/>
+            <a:ext cx="2256967" cy="3224611"/>
           </a:xfrm>
           <a:prstGeom prst="rect">
             <a:avLst/>
@@ -7157,13 +7188,13 @@
               </a:spcAft>
             </a:pPr>
             <a:r>
-              <a:rPr sz="1050" b="0" i="0">
+              <a:rPr sz="1300" b="0" i="0">
                 <a:solidFill>
                   <a:srgbClr val="3D4A63"/>
                 </a:solidFill>
                 <a:latin typeface="Arial"/>
               </a:rPr>
-              <a:t>•  The methods, prompts, trainer and seeds are unchanged; only the budget moves.</a:t>
+              <a:t>•  Methods, prompts, trainer and seeds unchanged; only the budget moves.</a:t>
             </a:r>
           </a:p>
           <a:p>
@@ -7176,13 +7207,13 @@
               </a:spcAft>
             </a:pPr>
             <a:r>
-              <a:rPr sz="1050" b="0" i="0">
+              <a:rPr sz="1300" b="0" i="0">
                 <a:solidFill>
                   <a:srgbClr val="3D4A63"/>
                 </a:solidFill>
                 <a:latin typeface="Arial"/>
               </a:rPr>
-              <a:t>•  Closest prior work is this project's own previous checkpoint, reused here as controls.</a:t>
+              <a:t>•  Closest prior work: our own last checkpoint, reused as controls.</a:t>
             </a:r>
           </a:p>
         </p:txBody>
@@ -7195,8 +7226,8 @@
         </p:nvSpPr>
         <p:spPr>
           <a:xfrm>
-            <a:off x="566928" y="3750310"/>
-            <a:ext cx="45720" cy="329184"/>
+            <a:off x="566928" y="5663062"/>
+            <a:ext cx="45720" cy="310896"/>
           </a:xfrm>
           <a:prstGeom prst="rect">
             <a:avLst/>
@@ -7239,8 +7270,8 @@
         </p:nvSpPr>
         <p:spPr>
           <a:xfrm>
-            <a:off x="713232" y="3722877"/>
-            <a:ext cx="10911535" cy="384048"/>
+            <a:off x="713232" y="5635630"/>
+            <a:ext cx="10911535" cy="365760"/>
           </a:xfrm>
           <a:prstGeom prst="rect">
             <a:avLst/>
@@ -7259,7 +7290,7 @@
               </a:spcAft>
             </a:pPr>
             <a:r>
-              <a:rPr sz="1150" b="1">
+              <a:rPr sz="1400" b="1">
                 <a:solidFill>
                   <a:srgbClr val="8C2F39"/>
                 </a:solidFill>
@@ -7268,7 +7299,7 @@
               <a:t>Next:  </a:t>
             </a:r>
             <a:r>
-              <a:rPr sz="1150" b="0">
+              <a:rPr sz="1400" b="0">
                 <a:solidFill>
                   <a:srgbClr val="3D4A63"/>
                 </a:solidFill>
@@ -7287,8 +7318,8 @@
         </p:nvSpPr>
         <p:spPr>
           <a:xfrm>
-            <a:off x="566928" y="6309359"/>
-            <a:ext cx="9399163" cy="219456"/>
+            <a:off x="566928" y="6382512"/>
+            <a:ext cx="9399163" cy="201168"/>
           </a:xfrm>
           <a:prstGeom prst="rect">
             <a:avLst/>
@@ -7307,7 +7338,7 @@
               </a:spcAft>
             </a:pPr>
             <a:r>
-              <a:rPr sz="850" b="0" i="0">
+              <a:rPr sz="950" b="0" i="0">
                 <a:solidFill>
                   <a:srgbClr val="929BAC"/>
                 </a:solidFill>
@@ -7326,8 +7357,8 @@
         </p:nvSpPr>
         <p:spPr>
           <a:xfrm>
-            <a:off x="9966091" y="6309359"/>
-            <a:ext cx="1658675" cy="219456"/>
+            <a:off x="9966091" y="6382512"/>
+            <a:ext cx="1658675" cy="201168"/>
           </a:xfrm>
           <a:prstGeom prst="rect">
             <a:avLst/>
@@ -7346,7 +7377,7 @@
               </a:spcAft>
             </a:pPr>
             <a:r>
-              <a:rPr sz="850" b="0" i="0">
+              <a:rPr sz="950" b="0" i="0">
                 <a:solidFill>
                   <a:srgbClr val="929BAC"/>
                 </a:solidFill>
@@ -7427,8 +7458,8 @@
         </p:nvSpPr>
         <p:spPr>
           <a:xfrm>
-            <a:off x="566928" y="384048"/>
-            <a:ext cx="11057839" cy="237744"/>
+            <a:off x="566928" y="310896"/>
+            <a:ext cx="11057839" cy="219456"/>
           </a:xfrm>
           <a:prstGeom prst="rect">
             <a:avLst/>
@@ -7447,13 +7478,13 @@
               </a:spcAft>
             </a:pPr>
             <a:r>
-              <a:rPr sz="1000" b="1" i="0" spc="150">
+              <a:rPr sz="1100" b="1" i="0" spc="150">
                 <a:solidFill>
                   <a:srgbClr val="8C2F39"/>
                 </a:solidFill>
                 <a:latin typeface="Arial"/>
               </a:rPr>
-              <a:t>3 · DEFINITIONS</a:t>
+              <a:t>3 · WHAT THE TERMS MEAN</a:t>
             </a:r>
           </a:p>
         </p:txBody>
@@ -7466,8 +7497,8 @@
         </p:nvSpPr>
         <p:spPr>
           <a:xfrm>
-            <a:off x="566928" y="621792"/>
-            <a:ext cx="11057839" cy="530352"/>
+            <a:off x="566928" y="530352"/>
+            <a:ext cx="11057839" cy="566928"/>
           </a:xfrm>
           <a:prstGeom prst="rect">
             <a:avLst/>
@@ -7489,7 +7520,7 @@
               </a:spcAft>
             </a:pPr>
             <a:r>
-              <a:rPr sz="2500" b="1" i="0">
+              <a:rPr sz="2700" b="1" i="0">
                 <a:solidFill>
                   <a:srgbClr val="14213D"/>
                 </a:solidFill>
@@ -7508,7 +7539,7 @@
         </p:nvSpPr>
         <p:spPr>
           <a:xfrm>
-            <a:off x="566928" y="1170431"/>
+            <a:off x="566928" y="1115568"/>
             <a:ext cx="11057839" cy="310896"/>
           </a:xfrm>
           <a:prstGeom prst="rect">
@@ -7531,7 +7562,7 @@
               </a:spcAft>
             </a:pPr>
             <a:r>
-              <a:rPr sz="1250" b="0" i="0">
+              <a:rPr sz="1450" b="0" i="0">
                 <a:solidFill>
                   <a:srgbClr val="626E85"/>
                 </a:solidFill>
@@ -7550,7 +7581,7 @@
         </p:nvSpPr>
         <p:spPr>
           <a:xfrm>
-            <a:off x="566928" y="1591055"/>
+            <a:off x="566928" y="1499616"/>
             <a:ext cx="11057839" cy="10972"/>
           </a:xfrm>
           <a:prstGeom prst="rect">
@@ -7594,7 +7625,7 @@
         </p:nvSpPr>
         <p:spPr>
           <a:xfrm>
-            <a:off x="566928" y="1828799"/>
+            <a:off x="566928" y="1664208"/>
             <a:ext cx="11057839" cy="420624"/>
           </a:xfrm>
           <a:prstGeom prst="roundRect">
@@ -7642,7 +7673,7 @@
         </p:nvSpPr>
         <p:spPr>
           <a:xfrm>
-            <a:off x="713232" y="1828799"/>
+            <a:off x="713232" y="1664208"/>
             <a:ext cx="10783519" cy="420624"/>
           </a:xfrm>
           <a:prstGeom prst="rect">
@@ -7662,7 +7693,7 @@
               </a:spcAft>
             </a:pPr>
             <a:r>
-              <a:rPr sz="1150" b="1">
+              <a:rPr sz="1400" b="1">
                 <a:solidFill>
                   <a:srgbClr val="1F4E79"/>
                 </a:solidFill>
@@ -7671,7 +7702,7 @@
               <a:t>Budget B  </a:t>
             </a:r>
             <a:r>
-              <a:rPr sz="1150" b="0">
+              <a:rPr sz="1400" b="0">
                 <a:solidFill>
                   <a:srgbClr val="3D4A63"/>
                 </a:solidFill>
@@ -7690,8 +7721,8 @@
         </p:nvSpPr>
         <p:spPr>
           <a:xfrm>
-            <a:off x="566928" y="2395727"/>
-            <a:ext cx="1962851" cy="1325626"/>
+            <a:off x="566928" y="2845612"/>
+            <a:ext cx="1962851" cy="1843430"/>
           </a:xfrm>
           <a:prstGeom prst="roundRect">
             <a:avLst>
@@ -7738,8 +7769,8 @@
         </p:nvSpPr>
         <p:spPr>
           <a:xfrm>
-            <a:off x="704088" y="2471165"/>
-            <a:ext cx="1688531" cy="274320"/>
+            <a:off x="731520" y="2936138"/>
+            <a:ext cx="1633667" cy="319786"/>
           </a:xfrm>
           <a:prstGeom prst="rect">
             <a:avLst/>
@@ -7758,7 +7789,7 @@
               </a:spcAft>
             </a:pPr>
             <a:r>
-              <a:rPr sz="1200" b="1" i="0">
+              <a:rPr sz="1450" b="1" i="0">
                 <a:solidFill>
                   <a:srgbClr val="FFFFFF"/>
                 </a:solidFill>
@@ -7777,8 +7808,8 @@
         </p:nvSpPr>
         <p:spPr>
           <a:xfrm>
-            <a:off x="704088" y="2782061"/>
-            <a:ext cx="1688531" cy="856996"/>
+            <a:off x="731520" y="3255924"/>
+            <a:ext cx="1633667" cy="1334363"/>
           </a:xfrm>
           <a:prstGeom prst="rect">
             <a:avLst/>
@@ -7800,7 +7831,7 @@
               </a:spcAft>
             </a:pPr>
             <a:r>
-              <a:rPr sz="1050" b="0" i="0">
+              <a:rPr sz="1300" b="0" i="0">
                 <a:solidFill>
                   <a:srgbClr val="A9B7CE"/>
                 </a:solidFill>
@@ -7819,7 +7850,7 @@
               </a:spcAft>
             </a:pPr>
             <a:r>
-              <a:rPr sz="1050" b="0" i="0">
+              <a:rPr sz="1300" b="0" i="0">
                 <a:solidFill>
                   <a:srgbClr val="A9B7CE"/>
                 </a:solidFill>
@@ -7838,8 +7869,8 @@
         </p:nvSpPr>
         <p:spPr>
           <a:xfrm>
-            <a:off x="2529779" y="2395727"/>
-            <a:ext cx="274320" cy="1325626"/>
+            <a:off x="2529779" y="2845612"/>
+            <a:ext cx="274320" cy="1843430"/>
           </a:xfrm>
           <a:prstGeom prst="rect">
             <a:avLst/>
@@ -7877,8 +7908,8 @@
         </p:nvSpPr>
         <p:spPr>
           <a:xfrm>
-            <a:off x="2840675" y="2395727"/>
-            <a:ext cx="1962851" cy="1325626"/>
+            <a:off x="2840675" y="2845612"/>
+            <a:ext cx="1962851" cy="1843430"/>
           </a:xfrm>
           <a:prstGeom prst="roundRect">
             <a:avLst>
@@ -7925,8 +7956,8 @@
         </p:nvSpPr>
         <p:spPr>
           <a:xfrm>
-            <a:off x="2977835" y="2471165"/>
-            <a:ext cx="1688531" cy="274320"/>
+            <a:off x="3005267" y="2936138"/>
+            <a:ext cx="1633667" cy="319786"/>
           </a:xfrm>
           <a:prstGeom prst="rect">
             <a:avLst/>
@@ -7945,7 +7976,7 @@
               </a:spcAft>
             </a:pPr>
             <a:r>
-              <a:rPr sz="1200" b="1" i="0">
+              <a:rPr sz="1450" b="1" i="0">
                 <a:solidFill>
                   <a:srgbClr val="1F4E79"/>
                 </a:solidFill>
@@ -7964,8 +7995,8 @@
         </p:nvSpPr>
         <p:spPr>
           <a:xfrm>
-            <a:off x="2977835" y="2782061"/>
-            <a:ext cx="1688531" cy="856996"/>
+            <a:off x="3005267" y="3255924"/>
+            <a:ext cx="1633667" cy="1334363"/>
           </a:xfrm>
           <a:prstGeom prst="rect">
             <a:avLst/>
@@ -7987,7 +8018,7 @@
               </a:spcAft>
             </a:pPr>
             <a:r>
-              <a:rPr sz="1050" b="0" i="0">
+              <a:rPr sz="1300" b="0" i="0">
                 <a:solidFill>
                   <a:srgbClr val="3D4A63"/>
                 </a:solidFill>
@@ -8006,7 +8037,7 @@
               </a:spcAft>
             </a:pPr>
             <a:r>
-              <a:rPr sz="1050" b="0" i="0">
+              <a:rPr sz="1300" b="0" i="0">
                 <a:solidFill>
                   <a:srgbClr val="3D4A63"/>
                 </a:solidFill>
@@ -8025,8 +8056,8 @@
         </p:nvSpPr>
         <p:spPr>
           <a:xfrm>
-            <a:off x="4803526" y="2395727"/>
-            <a:ext cx="274320" cy="1325626"/>
+            <a:off x="4803526" y="2845612"/>
+            <a:ext cx="274320" cy="1843430"/>
           </a:xfrm>
           <a:prstGeom prst="rect">
             <a:avLst/>
@@ -8064,8 +8095,8 @@
         </p:nvSpPr>
         <p:spPr>
           <a:xfrm>
-            <a:off x="5114422" y="2395727"/>
-            <a:ext cx="1962851" cy="1325626"/>
+            <a:off x="5114422" y="2845612"/>
+            <a:ext cx="1962851" cy="1843430"/>
           </a:xfrm>
           <a:prstGeom prst="roundRect">
             <a:avLst>
@@ -8112,8 +8143,8 @@
         </p:nvSpPr>
         <p:spPr>
           <a:xfrm>
-            <a:off x="5251582" y="2471165"/>
-            <a:ext cx="1688531" cy="274320"/>
+            <a:off x="5279014" y="2936138"/>
+            <a:ext cx="1633667" cy="548132"/>
           </a:xfrm>
           <a:prstGeom prst="rect">
             <a:avLst/>
@@ -8132,7 +8163,7 @@
               </a:spcAft>
             </a:pPr>
             <a:r>
-              <a:rPr sz="1200" b="1" i="0">
+              <a:rPr sz="1450" b="1" i="0">
                 <a:solidFill>
                   <a:srgbClr val="1F4E79"/>
                 </a:solidFill>
@@ -8151,8 +8182,8 @@
         </p:nvSpPr>
         <p:spPr>
           <a:xfrm>
-            <a:off x="5251582" y="2782061"/>
-            <a:ext cx="1688531" cy="856996"/>
+            <a:off x="5279014" y="3484270"/>
+            <a:ext cx="1633667" cy="1106017"/>
           </a:xfrm>
           <a:prstGeom prst="rect">
             <a:avLst/>
@@ -8174,7 +8205,7 @@
               </a:spcAft>
             </a:pPr>
             <a:r>
-              <a:rPr sz="1050" b="0" i="0">
+              <a:rPr sz="1300" b="0" i="0">
                 <a:solidFill>
                   <a:srgbClr val="3D4A63"/>
                 </a:solidFill>
@@ -8193,7 +8224,7 @@
               </a:spcAft>
             </a:pPr>
             <a:r>
-              <a:rPr sz="1050" b="0" i="0">
+              <a:rPr sz="1300" b="0" i="0">
                 <a:solidFill>
                   <a:srgbClr val="3D4A63"/>
                 </a:solidFill>
@@ -8212,8 +8243,8 @@
         </p:nvSpPr>
         <p:spPr>
           <a:xfrm>
-            <a:off x="7077273" y="2395727"/>
-            <a:ext cx="274320" cy="1325626"/>
+            <a:off x="7077273" y="2845612"/>
+            <a:ext cx="274320" cy="1843430"/>
           </a:xfrm>
           <a:prstGeom prst="rect">
             <a:avLst/>
@@ -8251,8 +8282,8 @@
         </p:nvSpPr>
         <p:spPr>
           <a:xfrm>
-            <a:off x="7388169" y="2395727"/>
-            <a:ext cx="1962851" cy="1325626"/>
+            <a:off x="7388169" y="2845612"/>
+            <a:ext cx="1962851" cy="1843430"/>
           </a:xfrm>
           <a:prstGeom prst="roundRect">
             <a:avLst>
@@ -8299,8 +8330,8 @@
         </p:nvSpPr>
         <p:spPr>
           <a:xfrm>
-            <a:off x="7525329" y="2471165"/>
-            <a:ext cx="1688531" cy="274320"/>
+            <a:off x="7552761" y="2936138"/>
+            <a:ext cx="1633667" cy="319786"/>
           </a:xfrm>
           <a:prstGeom prst="rect">
             <a:avLst/>
@@ -8319,7 +8350,7 @@
               </a:spcAft>
             </a:pPr>
             <a:r>
-              <a:rPr sz="1200" b="1" i="0">
+              <a:rPr sz="1450" b="1" i="0">
                 <a:solidFill>
                   <a:srgbClr val="245C42"/>
                 </a:solidFill>
@@ -8338,8 +8369,8 @@
         </p:nvSpPr>
         <p:spPr>
           <a:xfrm>
-            <a:off x="7525329" y="2782061"/>
-            <a:ext cx="1688531" cy="856996"/>
+            <a:off x="7552761" y="3255924"/>
+            <a:ext cx="1633667" cy="1334363"/>
           </a:xfrm>
           <a:prstGeom prst="rect">
             <a:avLst/>
@@ -8361,7 +8392,7 @@
               </a:spcAft>
             </a:pPr>
             <a:r>
-              <a:rPr sz="1050" b="0" i="0">
+              <a:rPr sz="1300" b="0" i="0">
                 <a:solidFill>
                   <a:srgbClr val="3D4A63"/>
                 </a:solidFill>
@@ -8380,7 +8411,7 @@
               </a:spcAft>
             </a:pPr>
             <a:r>
-              <a:rPr sz="1050" b="0" i="0">
+              <a:rPr sz="1300" b="0" i="0">
                 <a:solidFill>
                   <a:srgbClr val="3D4A63"/>
                 </a:solidFill>
@@ -8399,8 +8430,8 @@
         </p:nvSpPr>
         <p:spPr>
           <a:xfrm>
-            <a:off x="9351020" y="2395727"/>
-            <a:ext cx="274320" cy="1325626"/>
+            <a:off x="9351020" y="2845612"/>
+            <a:ext cx="274320" cy="1843430"/>
           </a:xfrm>
           <a:prstGeom prst="rect">
             <a:avLst/>
@@ -8438,8 +8469,8 @@
         </p:nvSpPr>
         <p:spPr>
           <a:xfrm>
-            <a:off x="9661916" y="2395727"/>
-            <a:ext cx="1962851" cy="1325626"/>
+            <a:off x="9661916" y="2845612"/>
+            <a:ext cx="1962851" cy="1843430"/>
           </a:xfrm>
           <a:prstGeom prst="roundRect">
             <a:avLst>
@@ -8486,8 +8517,8 @@
         </p:nvSpPr>
         <p:spPr>
           <a:xfrm>
-            <a:off x="9799076" y="2471165"/>
-            <a:ext cx="1688531" cy="274320"/>
+            <a:off x="9826508" y="2936138"/>
+            <a:ext cx="1633667" cy="319786"/>
           </a:xfrm>
           <a:prstGeom prst="rect">
             <a:avLst/>
@@ -8506,7 +8537,7 @@
               </a:spcAft>
             </a:pPr>
             <a:r>
-              <a:rPr sz="1200" b="1" i="0">
+              <a:rPr sz="1450" b="1" i="0">
                 <a:solidFill>
                   <a:srgbClr val="86302B"/>
                 </a:solidFill>
@@ -8525,8 +8556,8 @@
         </p:nvSpPr>
         <p:spPr>
           <a:xfrm>
-            <a:off x="9799076" y="2782061"/>
-            <a:ext cx="1688531" cy="856996"/>
+            <a:off x="9826508" y="3255924"/>
+            <a:ext cx="1633667" cy="1334363"/>
           </a:xfrm>
           <a:prstGeom prst="rect">
             <a:avLst/>
@@ -8548,7 +8579,7 @@
               </a:spcAft>
             </a:pPr>
             <a:r>
-              <a:rPr sz="1050" b="0" i="0">
+              <a:rPr sz="1300" b="0" i="0">
                 <a:solidFill>
                   <a:srgbClr val="3D4A63"/>
                 </a:solidFill>
@@ -8567,7 +8598,7 @@
               </a:spcAft>
             </a:pPr>
             <a:r>
-              <a:rPr sz="1050" b="0" i="0">
+              <a:rPr sz="1300" b="0" i="0">
                 <a:solidFill>
                   <a:srgbClr val="3D4A63"/>
                 </a:solidFill>
@@ -8586,7 +8617,7 @@
         </p:nvSpPr>
         <p:spPr>
           <a:xfrm>
-            <a:off x="566928" y="3959097"/>
+            <a:off x="566928" y="4926787"/>
             <a:ext cx="11057839" cy="530352"/>
           </a:xfrm>
           <a:prstGeom prst="rect">
@@ -8630,7 +8661,7 @@
         </p:nvSpPr>
         <p:spPr>
           <a:xfrm>
-            <a:off x="566928" y="3959097"/>
+            <a:off x="566928" y="4926787"/>
             <a:ext cx="45720" cy="530352"/>
           </a:xfrm>
           <a:prstGeom prst="rect">
@@ -8674,7 +8705,7 @@
         </p:nvSpPr>
         <p:spPr>
           <a:xfrm>
-            <a:off x="749808" y="3959097"/>
+            <a:off x="749808" y="4926787"/>
             <a:ext cx="10746943" cy="530352"/>
           </a:xfrm>
           <a:prstGeom prst="rect">
@@ -8697,7 +8728,7 @@
               </a:spcAft>
             </a:pPr>
             <a:r>
-              <a:rPr sz="1200" b="1" i="0">
+              <a:rPr sz="1450" b="1" i="0">
                 <a:solidFill>
                   <a:srgbClr val="14213D"/>
                 </a:solidFill>
@@ -8716,8 +8747,8 @@
         </p:nvSpPr>
         <p:spPr>
           <a:xfrm>
-            <a:off x="566928" y="4617465"/>
-            <a:ext cx="45720" cy="329184"/>
+            <a:off x="566928" y="5557723"/>
+            <a:ext cx="45720" cy="310896"/>
           </a:xfrm>
           <a:prstGeom prst="rect">
             <a:avLst/>
@@ -8760,8 +8791,8 @@
         </p:nvSpPr>
         <p:spPr>
           <a:xfrm>
-            <a:off x="713232" y="4590033"/>
-            <a:ext cx="10911535" cy="384048"/>
+            <a:off x="713232" y="5530291"/>
+            <a:ext cx="10911535" cy="365760"/>
           </a:xfrm>
           <a:prstGeom prst="rect">
             <a:avLst/>
@@ -8780,7 +8811,7 @@
               </a:spcAft>
             </a:pPr>
             <a:r>
-              <a:rPr sz="1150" b="1">
+              <a:rPr sz="1400" b="1">
                 <a:solidFill>
                   <a:srgbClr val="8C2F39"/>
                 </a:solidFill>
@@ -8789,7 +8820,7 @@
               <a:t>Next:  </a:t>
             </a:r>
             <a:r>
-              <a:rPr sz="1150" b="0">
+              <a:rPr sz="1400" b="0">
                 <a:solidFill>
                   <a:srgbClr val="3D4A63"/>
                 </a:solidFill>
@@ -8808,8 +8839,8 @@
         </p:nvSpPr>
         <p:spPr>
           <a:xfrm>
-            <a:off x="566928" y="6309359"/>
-            <a:ext cx="9399163" cy="219456"/>
+            <a:off x="566928" y="6382512"/>
+            <a:ext cx="9399163" cy="201168"/>
           </a:xfrm>
           <a:prstGeom prst="rect">
             <a:avLst/>
@@ -8828,7 +8859,7 @@
               </a:spcAft>
             </a:pPr>
             <a:r>
-              <a:rPr sz="850" b="0" i="0">
+              <a:rPr sz="950" b="0" i="0">
                 <a:solidFill>
                   <a:srgbClr val="929BAC"/>
                 </a:solidFill>
@@ -8847,8 +8878,8 @@
         </p:nvSpPr>
         <p:spPr>
           <a:xfrm>
-            <a:off x="9966091" y="6309359"/>
-            <a:ext cx="1658675" cy="219456"/>
+            <a:off x="9966091" y="6382512"/>
+            <a:ext cx="1658675" cy="201168"/>
           </a:xfrm>
           <a:prstGeom prst="rect">
             <a:avLst/>
@@ -8867,7 +8898,7 @@
               </a:spcAft>
             </a:pPr>
             <a:r>
-              <a:rPr sz="850" b="0" i="0">
+              <a:rPr sz="950" b="0" i="0">
                 <a:solidFill>
                   <a:srgbClr val="929BAC"/>
                 </a:solidFill>
@@ -8948,8 +8979,8 @@
         </p:nvSpPr>
         <p:spPr>
           <a:xfrm>
-            <a:off x="566928" y="384048"/>
-            <a:ext cx="11057839" cy="237744"/>
+            <a:off x="566928" y="310896"/>
+            <a:ext cx="11057839" cy="219456"/>
           </a:xfrm>
           <a:prstGeom prst="rect">
             <a:avLst/>
@@ -8968,13 +8999,13 @@
               </a:spcAft>
             </a:pPr>
             <a:r>
-              <a:rPr sz="1000" b="1" i="0" spc="150">
+              <a:rPr sz="1100" b="1" i="0" spc="150">
                 <a:solidFill>
                   <a:srgbClr val="8C2F39"/>
                 </a:solidFill>
                 <a:latin typeface="Arial"/>
               </a:rPr>
-              <a:t>4 · APPROACH</a:t>
+              <a:t>4 · METHOD: HOW THE EVIDENCE IS JUDGED</a:t>
             </a:r>
           </a:p>
         </p:txBody>
@@ -8987,8 +9018,8 @@
         </p:nvSpPr>
         <p:spPr>
           <a:xfrm>
-            <a:off x="566928" y="621792"/>
-            <a:ext cx="11057839" cy="530352"/>
+            <a:off x="566928" y="530352"/>
+            <a:ext cx="11057839" cy="566928"/>
           </a:xfrm>
           <a:prstGeom prst="rect">
             <a:avLst/>
@@ -9010,13 +9041,13 @@
               </a:spcAft>
             </a:pPr>
             <a:r>
-              <a:rPr sz="2500" b="1" i="0">
+              <a:rPr sz="2700" b="1" i="0">
                 <a:solidFill>
                   <a:srgbClr val="14213D"/>
                 </a:solidFill>
                 <a:latin typeface="Arial"/>
               </a:rPr>
-              <a:t>The judging rules were frozen and committed before any run</a:t>
+              <a:t>The judging rules were frozen before any run</a:t>
             </a:r>
           </a:p>
         </p:txBody>
@@ -9029,7 +9060,7 @@
         </p:nvSpPr>
         <p:spPr>
           <a:xfrm>
-            <a:off x="566928" y="1170431"/>
+            <a:off x="566928" y="1115568"/>
             <a:ext cx="11057839" cy="310896"/>
           </a:xfrm>
           <a:prstGeom prst="rect">
@@ -9052,7 +9083,7 @@
               </a:spcAft>
             </a:pPr>
             <a:r>
-              <a:rPr sz="1250" b="0" i="0">
+              <a:rPr sz="1450" b="0" i="0">
                 <a:solidFill>
                   <a:srgbClr val="626E85"/>
                 </a:solidFill>
@@ -9071,7 +9102,7 @@
         </p:nvSpPr>
         <p:spPr>
           <a:xfrm>
-            <a:off x="566928" y="1591055"/>
+            <a:off x="566928" y="1499616"/>
             <a:ext cx="11057839" cy="10972"/>
           </a:xfrm>
           <a:prstGeom prst="rect">
@@ -9116,8 +9147,8 @@
           <p:nvPr/>
         </p:nvGraphicFramePr>
         <p:xfrm>
-          <a:off x="566928" y="1828799"/>
-          <a:ext cx="7077017" cy="3517645"/>
+          <a:off x="566928" y="1664208"/>
+          <a:ext cx="7077017" cy="3657600"/>
         </p:xfrm>
         <a:graphic>
           <a:graphicData uri="http://schemas.openxmlformats.org/drawingml/2006/table">
@@ -9129,7 +9160,7 @@
                 <a:gridCol w="3538508"/>
                 <a:gridCol w="3538509"/>
               </a:tblGrid>
-              <a:tr h="351764">
+              <a:tr h="365760">
                 <a:tc>
                   <a:txBody>
                     <a:bodyPr/>
@@ -9141,7 +9172,7 @@
                         </a:spcAft>
                       </a:pPr>
                       <a:r>
-                        <a:rPr sz="1050" b="1" i="0">
+                        <a:rPr sz="1300" b="1" i="0">
                           <a:solidFill>
                             <a:srgbClr val="14213D"/>
                           </a:solidFill>
@@ -9168,7 +9199,7 @@
                         </a:spcAft>
                       </a:pPr>
                       <a:r>
-                        <a:rPr sz="1050" b="1" i="0">
+                        <a:rPr sz="1300" b="1" i="0">
                           <a:solidFill>
                             <a:srgbClr val="14213D"/>
                           </a:solidFill>
@@ -9185,7 +9216,7 @@
                   </a:tcPr>
                 </a:tc>
               </a:tr>
-              <a:tr h="351764">
+              <a:tr h="365760">
                 <a:tc>
                   <a:txBody>
                     <a:bodyPr/>
@@ -9197,7 +9228,7 @@
                         </a:spcAft>
                       </a:pPr>
                       <a:r>
-                        <a:rPr sz="1050" b="0" i="0">
+                        <a:rPr sz="1300" b="0" i="0">
                           <a:solidFill>
                             <a:srgbClr val="3D4A63"/>
                           </a:solidFill>
@@ -9224,7 +9255,7 @@
                         </a:spcAft>
                       </a:pPr>
                       <a:r>
-                        <a:rPr sz="1050" b="0" i="0">
+                        <a:rPr sz="1300" b="0" i="0">
                           <a:solidFill>
                             <a:srgbClr val="3D4A63"/>
                           </a:solidFill>
@@ -9241,7 +9272,7 @@
                   </a:tcPr>
                 </a:tc>
               </a:tr>
-              <a:tr h="351764">
+              <a:tr h="365760">
                 <a:tc>
                   <a:txBody>
                     <a:bodyPr/>
@@ -9253,7 +9284,7 @@
                         </a:spcAft>
                       </a:pPr>
                       <a:r>
-                        <a:rPr sz="1050" b="0" i="0">
+                        <a:rPr sz="1300" b="0" i="0">
                           <a:solidFill>
                             <a:srgbClr val="3D4A63"/>
                           </a:solidFill>
@@ -9280,7 +9311,7 @@
                         </a:spcAft>
                       </a:pPr>
                       <a:r>
-                        <a:rPr sz="1050" b="0" i="0">
+                        <a:rPr sz="1300" b="0" i="0">
                           <a:solidFill>
                             <a:srgbClr val="3D4A63"/>
                           </a:solidFill>
@@ -9297,7 +9328,7 @@
                   </a:tcPr>
                 </a:tc>
               </a:tr>
-              <a:tr h="351764">
+              <a:tr h="365760">
                 <a:tc>
                   <a:txBody>
                     <a:bodyPr/>
@@ -9309,7 +9340,7 @@
                         </a:spcAft>
                       </a:pPr>
                       <a:r>
-                        <a:rPr sz="1050" b="0" i="0">
+                        <a:rPr sz="1300" b="0" i="0">
                           <a:solidFill>
                             <a:srgbClr val="3D4A63"/>
                           </a:solidFill>
@@ -9336,7 +9367,7 @@
                         </a:spcAft>
                       </a:pPr>
                       <a:r>
-                        <a:rPr sz="1050" b="0" i="0">
+                        <a:rPr sz="1300" b="0" i="0">
                           <a:solidFill>
                             <a:srgbClr val="3D4A63"/>
                           </a:solidFill>
@@ -9353,7 +9384,7 @@
                   </a:tcPr>
                 </a:tc>
               </a:tr>
-              <a:tr h="351764">
+              <a:tr h="365760">
                 <a:tc>
                   <a:txBody>
                     <a:bodyPr/>
@@ -9365,7 +9396,7 @@
                         </a:spcAft>
                       </a:pPr>
                       <a:r>
-                        <a:rPr sz="1050" b="0" i="0">
+                        <a:rPr sz="1300" b="0" i="0">
                           <a:solidFill>
                             <a:srgbClr val="3D4A63"/>
                           </a:solidFill>
@@ -9392,7 +9423,7 @@
                         </a:spcAft>
                       </a:pPr>
                       <a:r>
-                        <a:rPr sz="1050" b="0" i="0">
+                        <a:rPr sz="1300" b="0" i="0">
                           <a:solidFill>
                             <a:srgbClr val="3D4A63"/>
                           </a:solidFill>
@@ -9409,7 +9440,7 @@
                   </a:tcPr>
                 </a:tc>
               </a:tr>
-              <a:tr h="351764">
+              <a:tr h="365760">
                 <a:tc>
                   <a:txBody>
                     <a:bodyPr/>
@@ -9421,7 +9452,7 @@
                         </a:spcAft>
                       </a:pPr>
                       <a:r>
-                        <a:rPr sz="1050" b="0" i="0">
+                        <a:rPr sz="1300" b="0" i="0">
                           <a:solidFill>
                             <a:srgbClr val="3D4A63"/>
                           </a:solidFill>
@@ -9448,7 +9479,7 @@
                         </a:spcAft>
                       </a:pPr>
                       <a:r>
-                        <a:rPr sz="1050" b="0" i="0">
+                        <a:rPr sz="1300" b="0" i="0">
                           <a:solidFill>
                             <a:srgbClr val="3D4A63"/>
                           </a:solidFill>
@@ -9465,7 +9496,7 @@
                   </a:tcPr>
                 </a:tc>
               </a:tr>
-              <a:tr h="351764">
+              <a:tr h="365760">
                 <a:tc>
                   <a:txBody>
                     <a:bodyPr/>
@@ -9477,7 +9508,7 @@
                         </a:spcAft>
                       </a:pPr>
                       <a:r>
-                        <a:rPr sz="1050" b="0" i="0">
+                        <a:rPr sz="1300" b="0" i="0">
                           <a:solidFill>
                             <a:srgbClr val="3D4A63"/>
                           </a:solidFill>
@@ -9504,7 +9535,7 @@
                         </a:spcAft>
                       </a:pPr>
                       <a:r>
-                        <a:rPr sz="1050" b="0" i="0">
+                        <a:rPr sz="1300" b="0" i="0">
                           <a:solidFill>
                             <a:srgbClr val="3D4A63"/>
                           </a:solidFill>
@@ -9521,7 +9552,7 @@
                   </a:tcPr>
                 </a:tc>
               </a:tr>
-              <a:tr h="351764">
+              <a:tr h="365760">
                 <a:tc>
                   <a:txBody>
                     <a:bodyPr/>
@@ -9533,7 +9564,7 @@
                         </a:spcAft>
                       </a:pPr>
                       <a:r>
-                        <a:rPr sz="1050" b="0" i="0">
+                        <a:rPr sz="1300" b="0" i="0">
                           <a:solidFill>
                             <a:srgbClr val="3D4A63"/>
                           </a:solidFill>
@@ -9560,7 +9591,7 @@
                         </a:spcAft>
                       </a:pPr>
                       <a:r>
-                        <a:rPr sz="1050" b="0" i="0">
+                        <a:rPr sz="1300" b="0" i="0">
                           <a:solidFill>
                             <a:srgbClr val="3D4A63"/>
                           </a:solidFill>
@@ -9577,7 +9608,7 @@
                   </a:tcPr>
                 </a:tc>
               </a:tr>
-              <a:tr h="351764">
+              <a:tr h="365760">
                 <a:tc>
                   <a:txBody>
                     <a:bodyPr/>
@@ -9589,7 +9620,7 @@
                         </a:spcAft>
                       </a:pPr>
                       <a:r>
-                        <a:rPr sz="1050" b="0" i="0">
+                        <a:rPr sz="1300" b="0" i="0">
                           <a:solidFill>
                             <a:srgbClr val="3D4A63"/>
                           </a:solidFill>
@@ -9616,7 +9647,7 @@
                         </a:spcAft>
                       </a:pPr>
                       <a:r>
-                        <a:rPr sz="1050" b="0" i="0">
+                        <a:rPr sz="1300" b="0" i="0">
                           <a:solidFill>
                             <a:srgbClr val="3D4A63"/>
                           </a:solidFill>
@@ -9633,7 +9664,7 @@
                   </a:tcPr>
                 </a:tc>
               </a:tr>
-              <a:tr h="351769">
+              <a:tr h="365760">
                 <a:tc>
                   <a:txBody>
                     <a:bodyPr/>
@@ -9645,7 +9676,7 @@
                         </a:spcAft>
                       </a:pPr>
                       <a:r>
-                        <a:rPr sz="1050" b="1" i="0">
+                        <a:rPr sz="1300" b="1" i="0">
                           <a:solidFill>
                             <a:srgbClr val="3D4A63"/>
                           </a:solidFill>
@@ -9672,7 +9703,7 @@
                         </a:spcAft>
                       </a:pPr>
                       <a:r>
-                        <a:rPr sz="1050" b="1" i="0">
+                        <a:rPr sz="1300" b="1" i="0">
                           <a:solidFill>
                             <a:srgbClr val="3D4A63"/>
                           </a:solidFill>
@@ -9701,7 +9732,7 @@
         </p:nvSpPr>
         <p:spPr>
           <a:xfrm>
-            <a:off x="566928" y="2169591"/>
+            <a:off x="566928" y="2018995"/>
             <a:ext cx="7077017" cy="10972"/>
           </a:xfrm>
           <a:prstGeom prst="rect">
@@ -9745,8 +9776,8 @@
         </p:nvSpPr>
         <p:spPr>
           <a:xfrm>
-            <a:off x="566928" y="5437885"/>
-            <a:ext cx="7077017" cy="405130"/>
+            <a:off x="566928" y="5413248"/>
+            <a:ext cx="7077017" cy="471170"/>
           </a:xfrm>
           <a:prstGeom prst="rect">
             <a:avLst/>
@@ -9765,7 +9796,7 @@
               </a:spcAft>
             </a:pPr>
             <a:r>
-              <a:rPr sz="950" b="1">
+              <a:rPr sz="1150" b="1">
                 <a:solidFill>
                   <a:srgbClr val="8C2F39"/>
                 </a:solidFill>
@@ -9774,7 +9805,7 @@
               <a:t>Does not show:  </a:t>
             </a:r>
             <a:r>
-              <a:rPr sz="950" b="0">
+              <a:rPr sz="1150" b="0">
                 <a:solidFill>
                   <a:srgbClr val="626E85"/>
                 </a:solidFill>
@@ -9793,8 +9824,8 @@
         </p:nvSpPr>
         <p:spPr>
           <a:xfrm>
-            <a:off x="7881689" y="1828799"/>
-            <a:ext cx="3743078" cy="3922775"/>
+            <a:off x="7881689" y="1664208"/>
+            <a:ext cx="3743078" cy="4242816"/>
           </a:xfrm>
           <a:prstGeom prst="rect">
             <a:avLst/>
@@ -9816,7 +9847,7 @@
               </a:spcAft>
             </a:pPr>
             <a:r>
-              <a:rPr sz="1150" b="1" i="0">
+              <a:rPr sz="1400" b="1" i="0">
                 <a:solidFill>
                   <a:srgbClr val="3D4A63"/>
                 </a:solidFill>
@@ -9835,7 +9866,7 @@
               </a:spcAft>
             </a:pPr>
             <a:r>
-              <a:rPr sz="1150" b="0" i="0">
+              <a:rPr sz="1400" b="0" i="0">
                 <a:solidFill>
                   <a:srgbClr val="3D4A63"/>
                 </a:solidFill>
@@ -9854,8 +9885,8 @@
         </p:nvSpPr>
         <p:spPr>
           <a:xfrm>
-            <a:off x="566928" y="5852159"/>
-            <a:ext cx="45720" cy="329184"/>
+            <a:off x="566928" y="5971032"/>
+            <a:ext cx="45720" cy="310896"/>
           </a:xfrm>
           <a:prstGeom prst="rect">
             <a:avLst/>
@@ -9898,8 +9929,8 @@
         </p:nvSpPr>
         <p:spPr>
           <a:xfrm>
-            <a:off x="713232" y="5824727"/>
-            <a:ext cx="10911535" cy="384048"/>
+            <a:off x="713232" y="5943600"/>
+            <a:ext cx="10911535" cy="365760"/>
           </a:xfrm>
           <a:prstGeom prst="rect">
             <a:avLst/>
@@ -9918,7 +9949,7 @@
               </a:spcAft>
             </a:pPr>
             <a:r>
-              <a:rPr sz="1150" b="1">
+              <a:rPr sz="1400" b="1">
                 <a:solidFill>
                   <a:srgbClr val="8C2F39"/>
                 </a:solidFill>
@@ -9927,7 +9958,7 @@
               <a:t>Next:  </a:t>
             </a:r>
             <a:r>
-              <a:rPr sz="1150" b="0">
+              <a:rPr sz="1400" b="0">
                 <a:solidFill>
                   <a:srgbClr val="3D4A63"/>
                 </a:solidFill>
@@ -9946,8 +9977,8 @@
         </p:nvSpPr>
         <p:spPr>
           <a:xfrm>
-            <a:off x="566928" y="6309359"/>
-            <a:ext cx="9399163" cy="219456"/>
+            <a:off x="566928" y="6382512"/>
+            <a:ext cx="9399163" cy="201168"/>
           </a:xfrm>
           <a:prstGeom prst="rect">
             <a:avLst/>
@@ -9966,7 +9997,7 @@
               </a:spcAft>
             </a:pPr>
             <a:r>
-              <a:rPr sz="850" b="0" i="0">
+              <a:rPr sz="950" b="0" i="0">
                 <a:solidFill>
                   <a:srgbClr val="929BAC"/>
                 </a:solidFill>
@@ -9985,8 +10016,8 @@
         </p:nvSpPr>
         <p:spPr>
           <a:xfrm>
-            <a:off x="9966091" y="6309359"/>
-            <a:ext cx="1658675" cy="219456"/>
+            <a:off x="9966091" y="6382512"/>
+            <a:ext cx="1658675" cy="201168"/>
           </a:xfrm>
           <a:prstGeom prst="rect">
             <a:avLst/>
@@ -10005,7 +10036,7 @@
               </a:spcAft>
             </a:pPr>
             <a:r>
-              <a:rPr sz="850" b="0" i="0">
+              <a:rPr sz="950" b="0" i="0">
                 <a:solidFill>
                   <a:srgbClr val="929BAC"/>
                 </a:solidFill>
@@ -10086,8 +10117,8 @@
         </p:nvSpPr>
         <p:spPr>
           <a:xfrm>
-            <a:off x="566928" y="384048"/>
-            <a:ext cx="11057839" cy="237744"/>
+            <a:off x="566928" y="310896"/>
+            <a:ext cx="11057839" cy="219456"/>
           </a:xfrm>
           <a:prstGeom prst="rect">
             <a:avLst/>
@@ -10106,13 +10137,13 @@
               </a:spcAft>
             </a:pPr>
             <a:r>
-              <a:rPr sz="1000" b="1" i="0" spc="150">
+              <a:rPr sz="1100" b="1" i="0" spc="150">
                 <a:solidFill>
                   <a:srgbClr val="8C2F39"/>
                 </a:solidFill>
                 <a:latin typeface="Arial"/>
               </a:rPr>
-              <a:t>5 · EXECUTION AND REPRODUCIBILITY</a:t>
+              <a:t>5 · METHOD: WHAT WAS ACTUALLY RUN</a:t>
             </a:r>
           </a:p>
         </p:txBody>
@@ -10125,8 +10156,8 @@
         </p:nvSpPr>
         <p:spPr>
           <a:xfrm>
-            <a:off x="566928" y="621792"/>
-            <a:ext cx="11057839" cy="530352"/>
+            <a:off x="566928" y="530352"/>
+            <a:ext cx="11057839" cy="566928"/>
           </a:xfrm>
           <a:prstGeom prst="rect">
             <a:avLst/>
@@ -10148,13 +10179,13 @@
               </a:spcAft>
             </a:pPr>
             <a:r>
-              <a:rPr sz="2500" b="1" i="0">
+              <a:rPr sz="2700" b="1" i="0">
                 <a:solidFill>
                   <a:srgbClr val="14213D"/>
                 </a:solidFill>
                 <a:latin typeface="Arial"/>
               </a:rPr>
-              <a:t>Two new runs, seven reused conditions, no test evaluation</a:t>
+              <a:t>Two new runs, seven reused, no test evaluation</a:t>
             </a:r>
           </a:p>
         </p:txBody>
@@ -10167,7 +10198,7 @@
         </p:nvSpPr>
         <p:spPr>
           <a:xfrm>
-            <a:off x="566928" y="1170431"/>
+            <a:off x="566928" y="1115568"/>
             <a:ext cx="11057839" cy="310896"/>
           </a:xfrm>
           <a:prstGeom prst="rect">
@@ -10190,7 +10221,7 @@
               </a:spcAft>
             </a:pPr>
             <a:r>
-              <a:rPr sz="1250" b="0" i="0">
+              <a:rPr sz="1450" b="0" i="0">
                 <a:solidFill>
                   <a:srgbClr val="626E85"/>
                 </a:solidFill>
@@ -10209,7 +10240,7 @@
         </p:nvSpPr>
         <p:spPr>
           <a:xfrm>
-            <a:off x="566928" y="1591055"/>
+            <a:off x="566928" y="1499616"/>
             <a:ext cx="11057839" cy="10972"/>
           </a:xfrm>
           <a:prstGeom prst="rect">
@@ -10253,8 +10284,8 @@
         </p:nvSpPr>
         <p:spPr>
           <a:xfrm>
-            <a:off x="566928" y="1828799"/>
-            <a:ext cx="2586151" cy="2050542"/>
+            <a:off x="566928" y="1664208"/>
+            <a:ext cx="2586151" cy="3411809"/>
           </a:xfrm>
           <a:prstGeom prst="roundRect">
             <a:avLst>
@@ -10301,8 +10332,8 @@
         </p:nvSpPr>
         <p:spPr>
           <a:xfrm>
-            <a:off x="704088" y="1904237"/>
-            <a:ext cx="2311831" cy="274320"/>
+            <a:off x="731520" y="1754733"/>
+            <a:ext cx="2256967" cy="548132"/>
           </a:xfrm>
           <a:prstGeom prst="rect">
             <a:avLst/>
@@ -10321,7 +10352,7 @@
               </a:spcAft>
             </a:pPr>
             <a:r>
-              <a:rPr sz="1200" b="1" i="0">
+              <a:rPr sz="1450" b="1" i="0">
                 <a:solidFill>
                   <a:srgbClr val="FFFFFF"/>
                 </a:solidFill>
@@ -10340,8 +10371,8 @@
         </p:nvSpPr>
         <p:spPr>
           <a:xfrm>
-            <a:off x="704088" y="2215133"/>
-            <a:ext cx="2311831" cy="1581912"/>
+            <a:off x="731520" y="2302865"/>
+            <a:ext cx="2256967" cy="2674396"/>
           </a:xfrm>
           <a:prstGeom prst="rect">
             <a:avLst/>
@@ -10363,7 +10394,7 @@
               </a:spcAft>
             </a:pPr>
             <a:r>
-              <a:rPr sz="1050" b="0" i="0">
+              <a:rPr sz="1300" b="0" i="0">
                 <a:solidFill>
                   <a:srgbClr val="A9B7CE"/>
                 </a:solidFill>
@@ -10382,13 +10413,13 @@
               </a:spcAft>
             </a:pPr>
             <a:r>
-              <a:rPr sz="1050" b="0" i="0">
+              <a:rPr sz="1300" b="0" i="0">
                 <a:solidFill>
                   <a:srgbClr val="A9B7CE"/>
                 </a:solidFill>
                 <a:latin typeface="Arial"/>
               </a:rPr>
-              <a:t>•  Re-analysis reproduces the earlier audit byte for byte (CONFIRMED by directory comparison).</a:t>
+              <a:t>•  Reproduces the earlier audit byte for byte (CONFIRMED).</a:t>
             </a:r>
           </a:p>
         </p:txBody>
@@ -10401,8 +10432,8 @@
         </p:nvSpPr>
         <p:spPr>
           <a:xfrm>
-            <a:off x="3390823" y="1828799"/>
-            <a:ext cx="2586151" cy="2050542"/>
+            <a:off x="3390823" y="1664208"/>
+            <a:ext cx="2586151" cy="3411809"/>
           </a:xfrm>
           <a:prstGeom prst="roundRect">
             <a:avLst>
@@ -10449,8 +10480,8 @@
         </p:nvSpPr>
         <p:spPr>
           <a:xfrm>
-            <a:off x="3527983" y="1904237"/>
-            <a:ext cx="2311831" cy="274320"/>
+            <a:off x="3555415" y="1754733"/>
+            <a:ext cx="2256967" cy="319786"/>
           </a:xfrm>
           <a:prstGeom prst="rect">
             <a:avLst/>
@@ -10469,7 +10500,7 @@
               </a:spcAft>
             </a:pPr>
             <a:r>
-              <a:rPr sz="1200" b="1" i="0">
+              <a:rPr sz="1450" b="1" i="0">
                 <a:solidFill>
                   <a:srgbClr val="1F4E79"/>
                 </a:solidFill>
@@ -10488,8 +10519,8 @@
         </p:nvSpPr>
         <p:spPr>
           <a:xfrm>
-            <a:off x="3527983" y="2215133"/>
-            <a:ext cx="2311831" cy="1581912"/>
+            <a:off x="3555415" y="2074519"/>
+            <a:ext cx="2256967" cy="2902742"/>
           </a:xfrm>
           <a:prstGeom prst="rect">
             <a:avLst/>
@@ -10511,7 +10542,7 @@
               </a:spcAft>
             </a:pPr>
             <a:r>
-              <a:rPr sz="1050" b="0" i="0">
+              <a:rPr sz="1300" b="0" i="0">
                 <a:solidFill>
                   <a:srgbClr val="3D4A63"/>
                 </a:solidFill>
@@ -10530,7 +10561,7 @@
               </a:spcAft>
             </a:pPr>
             <a:r>
-              <a:rPr sz="1050" b="0" i="0">
+              <a:rPr sz="1300" b="0" i="0">
                 <a:solidFill>
                   <a:srgbClr val="3D4A63"/>
                 </a:solidFill>
@@ -10549,7 +10580,7 @@
               </a:spcAft>
             </a:pPr>
             <a:r>
-              <a:rPr sz="1050" b="0" i="0">
+              <a:rPr sz="1300" b="0" i="0">
                 <a:solidFill>
                   <a:srgbClr val="3D4A63"/>
                 </a:solidFill>
@@ -10568,8 +10599,8 @@
         </p:nvSpPr>
         <p:spPr>
           <a:xfrm>
-            <a:off x="6214719" y="1828799"/>
-            <a:ext cx="2586151" cy="2050542"/>
+            <a:off x="6214719" y="1664208"/>
+            <a:ext cx="2586151" cy="3411809"/>
           </a:xfrm>
           <a:prstGeom prst="roundRect">
             <a:avLst>
@@ -10616,8 +10647,8 @@
         </p:nvSpPr>
         <p:spPr>
           <a:xfrm>
-            <a:off x="6351879" y="1904237"/>
-            <a:ext cx="2311831" cy="274320"/>
+            <a:off x="6379311" y="1754733"/>
+            <a:ext cx="2256967" cy="319786"/>
           </a:xfrm>
           <a:prstGeom prst="rect">
             <a:avLst/>
@@ -10636,7 +10667,7 @@
               </a:spcAft>
             </a:pPr>
             <a:r>
-              <a:rPr sz="1200" b="1" i="0">
+              <a:rPr sz="1450" b="1" i="0">
                 <a:solidFill>
                   <a:srgbClr val="245C42"/>
                 </a:solidFill>
@@ -10655,8 +10686,8 @@
         </p:nvSpPr>
         <p:spPr>
           <a:xfrm>
-            <a:off x="6351879" y="2215133"/>
-            <a:ext cx="2311831" cy="1581912"/>
+            <a:off x="6379311" y="2074519"/>
+            <a:ext cx="2256967" cy="2902742"/>
           </a:xfrm>
           <a:prstGeom prst="rect">
             <a:avLst/>
@@ -10678,13 +10709,13 @@
               </a:spcAft>
             </a:pPr>
             <a:r>
-              <a:rPr sz="1050" b="0" i="0">
+              <a:rPr sz="1300" b="0" i="0">
                 <a:solidFill>
                   <a:srgbClr val="3D4A63"/>
                 </a:solidFill>
                 <a:latin typeface="Arial"/>
               </a:rPr>
-              <a:t>•  Seed completeness, candidate order, finite fidelity, selection equals validation max.</a:t>
+              <a:t>•  Seed completeness, candidate order, finite fidelity.</a:t>
             </a:r>
           </a:p>
           <a:p>
@@ -10697,13 +10728,13 @@
               </a:spcAft>
             </a:pPr>
             <a:r>
-              <a:rPr sz="1050" b="0" i="0">
+              <a:rPr sz="1300" b="0" i="0">
                 <a:solidFill>
                   <a:srgbClr val="3D4A63"/>
                 </a:solidFill>
                 <a:latin typeface="Arial"/>
               </a:rPr>
-              <a:t>•  A machine check refuses any cell that moves more than the budget away from its declared anchor.</a:t>
+              <a:t>•  A machine check refuses any two-factor cell.</a:t>
             </a:r>
           </a:p>
           <a:p>
@@ -10716,7 +10747,7 @@
               </a:spcAft>
             </a:pPr>
             <a:r>
-              <a:rPr sz="1050" b="0" i="0">
+              <a:rPr sz="1300" b="0" i="0">
                 <a:solidFill>
                   <a:srgbClr val="3D4A63"/>
                 </a:solidFill>
@@ -10735,8 +10766,8 @@
         </p:nvSpPr>
         <p:spPr>
           <a:xfrm>
-            <a:off x="9038615" y="1828799"/>
-            <a:ext cx="2586151" cy="2050542"/>
+            <a:off x="9038615" y="1664208"/>
+            <a:ext cx="2586151" cy="3411809"/>
           </a:xfrm>
           <a:prstGeom prst="roundRect">
             <a:avLst>
@@ -10783,8 +10814,8 @@
         </p:nvSpPr>
         <p:spPr>
           <a:xfrm>
-            <a:off x="9175775" y="1904237"/>
-            <a:ext cx="2311831" cy="274320"/>
+            <a:off x="9203207" y="1754733"/>
+            <a:ext cx="2256967" cy="319786"/>
           </a:xfrm>
           <a:prstGeom prst="rect">
             <a:avLst/>
@@ -10803,7 +10834,7 @@
               </a:spcAft>
             </a:pPr>
             <a:r>
-              <a:rPr sz="1200" b="1" i="0">
+              <a:rPr sz="1450" b="1" i="0">
                 <a:solidFill>
                   <a:srgbClr val="7A5A15"/>
                 </a:solidFill>
@@ -10822,8 +10853,8 @@
         </p:nvSpPr>
         <p:spPr>
           <a:xfrm>
-            <a:off x="9175775" y="2215133"/>
-            <a:ext cx="2311831" cy="1581912"/>
+            <a:off x="9203207" y="2074519"/>
+            <a:ext cx="2256967" cy="2902742"/>
           </a:xfrm>
           <a:prstGeom prst="rect">
             <a:avLst/>
@@ -10845,7 +10876,7 @@
               </a:spcAft>
             </a:pPr>
             <a:r>
-              <a:rPr sz="1050" b="0" i="0">
+              <a:rPr sz="1300" b="0" i="0">
                 <a:solidFill>
                   <a:srgbClr val="3D4A63"/>
                 </a:solidFill>
@@ -10864,13 +10895,13 @@
               </a:spcAft>
             </a:pPr>
             <a:r>
-              <a:rPr sz="1050" b="0" i="0">
+              <a:rPr sz="1300" b="0" i="0">
                 <a:solidFill>
                   <a:srgbClr val="3D4A63"/>
                 </a:solidFill>
                 <a:latin typeface="Arial"/>
               </a:rPr>
-              <a:t>•  One run was interrupted by a network failure; the resume paid nothing for stored seeds.</a:t>
+              <a:t>•  One run was interrupted; the resume paid nothing for stored seeds.</a:t>
             </a:r>
           </a:p>
         </p:txBody>
@@ -10883,8 +10914,8 @@
         </p:nvSpPr>
         <p:spPr>
           <a:xfrm>
-            <a:off x="566928" y="4144518"/>
-            <a:ext cx="45720" cy="329184"/>
+            <a:off x="566928" y="5341193"/>
+            <a:ext cx="45720" cy="310896"/>
           </a:xfrm>
           <a:prstGeom prst="rect">
             <a:avLst/>
@@ -10927,8 +10958,8 @@
         </p:nvSpPr>
         <p:spPr>
           <a:xfrm>
-            <a:off x="713232" y="4117086"/>
-            <a:ext cx="10911535" cy="384048"/>
+            <a:off x="713232" y="5313761"/>
+            <a:ext cx="10911535" cy="365760"/>
           </a:xfrm>
           <a:prstGeom prst="rect">
             <a:avLst/>
@@ -10947,7 +10978,7 @@
               </a:spcAft>
             </a:pPr>
             <a:r>
-              <a:rPr sz="1150" b="1">
+              <a:rPr sz="1400" b="1">
                 <a:solidFill>
                   <a:srgbClr val="8C2F39"/>
                 </a:solidFill>
@@ -10956,7 +10987,7 @@
               <a:t>Next:  </a:t>
             </a:r>
             <a:r>
-              <a:rPr sz="1150" b="0">
+              <a:rPr sz="1400" b="0">
                 <a:solidFill>
                   <a:srgbClr val="3D4A63"/>
                 </a:solidFill>
@@ -10975,8 +11006,8 @@
         </p:nvSpPr>
         <p:spPr>
           <a:xfrm>
-            <a:off x="566928" y="5980175"/>
-            <a:ext cx="11057839" cy="329184"/>
+            <a:off x="566928" y="6089904"/>
+            <a:ext cx="11057839" cy="292608"/>
           </a:xfrm>
           <a:prstGeom prst="rect">
             <a:avLst/>
@@ -10998,7 +11029,7 @@
               </a:spcAft>
             </a:pPr>
             <a:r>
-              <a:rPr sz="850" b="0" i="0">
+              <a:rPr sz="1050" b="0" i="0">
                 <a:solidFill>
                   <a:srgbClr val="929BAC"/>
                 </a:solidFill>
@@ -11017,8 +11048,8 @@
         </p:nvSpPr>
         <p:spPr>
           <a:xfrm>
-            <a:off x="566928" y="6309359"/>
-            <a:ext cx="9399163" cy="219456"/>
+            <a:off x="566928" y="6382512"/>
+            <a:ext cx="9399163" cy="201168"/>
           </a:xfrm>
           <a:prstGeom prst="rect">
             <a:avLst/>
@@ -11037,7 +11068,7 @@
               </a:spcAft>
             </a:pPr>
             <a:r>
-              <a:rPr sz="850" b="0" i="0">
+              <a:rPr sz="950" b="0" i="0">
                 <a:solidFill>
                   <a:srgbClr val="929BAC"/>
                 </a:solidFill>
@@ -11056,8 +11087,8 @@
         </p:nvSpPr>
         <p:spPr>
           <a:xfrm>
-            <a:off x="9966091" y="6309359"/>
-            <a:ext cx="1658675" cy="219456"/>
+            <a:off x="9966091" y="6382512"/>
+            <a:ext cx="1658675" cy="201168"/>
           </a:xfrm>
           <a:prstGeom prst="rect">
             <a:avLst/>
@@ -11076,7 +11107,7 @@
               </a:spcAft>
             </a:pPr>
             <a:r>
-              <a:rPr sz="850" b="0" i="0">
+              <a:rPr sz="950" b="0" i="0">
                 <a:solidFill>
                   <a:srgbClr val="929BAC"/>
                 </a:solidFill>
@@ -11157,8 +11188,8 @@
         </p:nvSpPr>
         <p:spPr>
           <a:xfrm>
-            <a:off x="566928" y="384048"/>
-            <a:ext cx="11057839" cy="237744"/>
+            <a:off x="566928" y="310896"/>
+            <a:ext cx="11057839" cy="219456"/>
           </a:xfrm>
           <a:prstGeom prst="rect">
             <a:avLst/>
@@ -11177,13 +11208,13 @@
               </a:spcAft>
             </a:pPr>
             <a:r>
-              <a:rPr sz="1000" b="1" i="0" spc="150">
+              <a:rPr sz="1100" b="1" i="0" spc="150">
                 <a:solidFill>
                   <a:srgbClr val="8C2F39"/>
                 </a:solidFill>
                 <a:latin typeface="Arial"/>
               </a:rPr>
-              <a:t>6 · MAIN RESULT</a:t>
+              <a:t>6 · RESULT</a:t>
             </a:r>
           </a:p>
         </p:txBody>
@@ -11196,8 +11227,8 @@
         </p:nvSpPr>
         <p:spPr>
           <a:xfrm>
-            <a:off x="566928" y="621792"/>
-            <a:ext cx="11057839" cy="905002"/>
+            <a:off x="566928" y="530352"/>
+            <a:ext cx="11057839" cy="566928"/>
           </a:xfrm>
           <a:prstGeom prst="rect">
             <a:avLst/>
@@ -11219,13 +11250,13 @@
               </a:spcAft>
             </a:pPr>
             <a:r>
-              <a:rPr sz="2500" b="1" i="0">
+              <a:rPr sz="2700" b="1" i="0">
                 <a:solidFill>
                   <a:srgbClr val="14213D"/>
                 </a:solidFill>
                 <a:latin typeface="Arial"/>
               </a:rPr>
-              <a:t>The open loop clears the bar at a budget the closed loop cannot</a:t>
+              <a:t>Open clears the bar at a budget closed cannot</a:t>
             </a:r>
           </a:p>
         </p:txBody>
@@ -11238,7 +11269,7 @@
         </p:nvSpPr>
         <p:spPr>
           <a:xfrm>
-            <a:off x="566928" y="1545082"/>
+            <a:off x="566928" y="1115568"/>
             <a:ext cx="11057839" cy="310896"/>
           </a:xfrm>
           <a:prstGeom prst="rect">
@@ -11261,7 +11292,7 @@
               </a:spcAft>
             </a:pPr>
             <a:r>
-              <a:rPr sz="1250" b="0" i="0">
+              <a:rPr sz="1450" b="0" i="0">
                 <a:solidFill>
                   <a:srgbClr val="626E85"/>
                 </a:solidFill>
@@ -11280,7 +11311,7 @@
         </p:nvSpPr>
         <p:spPr>
           <a:xfrm>
-            <a:off x="566928" y="1965705"/>
+            <a:off x="566928" y="1499616"/>
             <a:ext cx="11057839" cy="10972"/>
           </a:xfrm>
           <a:prstGeom prst="rect">
@@ -11332,8 +11363,8 @@
         </p:blipFill>
         <p:spPr>
           <a:xfrm>
-            <a:off x="1298278" y="2203450"/>
-            <a:ext cx="5172001" cy="2151252"/>
+            <a:off x="688220" y="1664208"/>
+            <a:ext cx="7055588" cy="2934715"/>
           </a:xfrm>
           <a:prstGeom prst="rect">
             <a:avLst/>
@@ -11348,8 +11379,8 @@
         </p:nvSpPr>
         <p:spPr>
           <a:xfrm>
-            <a:off x="566928" y="4409566"/>
-            <a:ext cx="6634703" cy="561975"/>
+            <a:off x="566928" y="4653787"/>
+            <a:ext cx="7298173" cy="471170"/>
           </a:xfrm>
           <a:prstGeom prst="rect">
             <a:avLst/>
@@ -11371,13 +11402,13 @@
               </a:spcAft>
             </a:pPr>
             <a:r>
-              <a:rPr sz="950" b="0" i="1">
+              <a:rPr sz="1150" b="0" i="1">
                 <a:solidFill>
                   <a:srgbClr val="626E85"/>
                 </a:solidFill>
                 <a:latin typeface="Arial"/>
               </a:rPr>
-              <a:t>x: configured budget B, candidate circuits per seed. y: how many of the 12 paired seeds finished at or above validation fidelity 0.95. Dashed line: the 10-of-12 rule. Thick outline: measured here. Grey bands: budgets not run. Grey random, amber greedy, blue open loop, red closed loop.</a:t>
+              <a:t>x: budget B. y: seeds (of 12) reaching validation fidelity 0.95. Dashed: the 10-of-12 rule. Thick outline: measured here; grey band: not run.</a:t>
             </a:r>
           </a:p>
         </p:txBody>
@@ -11390,8 +11421,8 @@
         </p:nvSpPr>
         <p:spPr>
           <a:xfrm>
-            <a:off x="566928" y="4971541"/>
-            <a:ext cx="6634703" cy="405130"/>
+            <a:off x="566928" y="5124957"/>
+            <a:ext cx="7298173" cy="471170"/>
           </a:xfrm>
           <a:prstGeom prst="rect">
             <a:avLst/>
@@ -11410,7 +11441,7 @@
               </a:spcAft>
             </a:pPr>
             <a:r>
-              <a:rPr sz="950" b="1">
+              <a:rPr sz="1150" b="1">
                 <a:solidFill>
                   <a:srgbClr val="8C2F39"/>
                 </a:solidFill>
@@ -11419,13 +11450,13 @@
               <a:t>Does not show:  </a:t>
             </a:r>
             <a:r>
-              <a:rPr sz="950" b="0">
+              <a:rPr sz="1150" b="0">
                 <a:solidFill>
                   <a:srgbClr val="626E85"/>
                 </a:solidFill>
                 <a:latin typeface="Arial"/>
               </a:rPr>
-              <a:t>No error bars - the quantity is a count over a fixed seed set, not an average. Nothing about budgets 12 or 14, the second target, other widths, or held-out test performance.</a:t>
+              <a:t>A count, not an average, so no error bars. Nothing about budgets 12 or 14, other widths, or the test set.</a:t>
             </a:r>
           </a:p>
         </p:txBody>
@@ -11438,8 +11469,8 @@
         </p:nvSpPr>
         <p:spPr>
           <a:xfrm>
-            <a:off x="7439375" y="2203450"/>
-            <a:ext cx="4185391" cy="954108"/>
+            <a:off x="8102845" y="1664208"/>
+            <a:ext cx="3521921" cy="2162511"/>
           </a:xfrm>
           <a:prstGeom prst="roundRect">
             <a:avLst>
@@ -11486,8 +11517,8 @@
         </p:nvSpPr>
         <p:spPr>
           <a:xfrm>
-            <a:off x="7576535" y="2278888"/>
-            <a:ext cx="3911071" cy="274320"/>
+            <a:off x="8267437" y="1754733"/>
+            <a:ext cx="3192737" cy="319786"/>
           </a:xfrm>
           <a:prstGeom prst="rect">
             <a:avLst/>
@@ -11506,7 +11537,7 @@
               </a:spcAft>
             </a:pPr>
             <a:r>
-              <a:rPr sz="1200" b="1" i="0">
+              <a:rPr sz="1450" b="1" i="0">
                 <a:solidFill>
                   <a:srgbClr val="1F4E79"/>
                 </a:solidFill>
@@ -11525,8 +11556,8 @@
         </p:nvSpPr>
         <p:spPr>
           <a:xfrm>
-            <a:off x="7576535" y="2589784"/>
-            <a:ext cx="3911071" cy="485478"/>
+            <a:off x="8267437" y="2074519"/>
+            <a:ext cx="3192737" cy="1653445"/>
           </a:xfrm>
           <a:prstGeom prst="rect">
             <a:avLst/>
@@ -11548,13 +11579,13 @@
               </a:spcAft>
             </a:pPr>
             <a:r>
-              <a:rPr sz="1050" b="0" i="0">
+              <a:rPr sz="1300" b="0" i="0">
                 <a:solidFill>
                   <a:srgbClr val="3D4A63"/>
                 </a:solidFill>
                 <a:latin typeface="Arial"/>
               </a:rPr>
-              <a:t>•  Budget 6: open 12/12 passes, closed 8/12 fails.</a:t>
+              <a:t>•  Open 12/12 passes, closed 8/12 fails.</a:t>
             </a:r>
           </a:p>
           <a:p>
@@ -11567,13 +11598,13 @@
               </a:spcAft>
             </a:pPr>
             <a:r>
-              <a:rPr sz="1050" b="0" i="0">
+              <a:rPr sz="1300" b="0" i="0">
                 <a:solidFill>
                   <a:srgbClr val="3D4A63"/>
                 </a:solidFill>
                 <a:latin typeface="Arial"/>
               </a:rPr>
-              <a:t>•  Same budget and seeds: random 0/12, greedy 2/12.</a:t>
+              <a:t>•  Random 0/12, greedy 2/12, same seeds.</a:t>
             </a:r>
           </a:p>
         </p:txBody>
@@ -11586,8 +11617,8 @@
         </p:nvSpPr>
         <p:spPr>
           <a:xfrm>
-            <a:off x="7439375" y="3285574"/>
-            <a:ext cx="4185391" cy="954108"/>
+            <a:off x="8102845" y="3954735"/>
+            <a:ext cx="3521921" cy="1586528"/>
           </a:xfrm>
           <a:prstGeom prst="roundRect">
             <a:avLst>
@@ -11634,8 +11665,8 @@
         </p:nvSpPr>
         <p:spPr>
           <a:xfrm>
-            <a:off x="7576535" y="3361012"/>
-            <a:ext cx="3911071" cy="274320"/>
+            <a:off x="8267437" y="4045261"/>
+            <a:ext cx="3192737" cy="319786"/>
           </a:xfrm>
           <a:prstGeom prst="rect">
             <a:avLst/>
@@ -11654,7 +11685,7 @@
               </a:spcAft>
             </a:pPr>
             <a:r>
-              <a:rPr sz="1200" b="1" i="0">
+              <a:rPr sz="1450" b="1" i="0">
                 <a:solidFill>
                   <a:srgbClr val="86302B"/>
                 </a:solidFill>
@@ -11673,8 +11704,8 @@
         </p:nvSpPr>
         <p:spPr>
           <a:xfrm>
-            <a:off x="7576535" y="3671908"/>
-            <a:ext cx="3911071" cy="485478"/>
+            <a:off x="8267437" y="4365047"/>
+            <a:ext cx="3192737" cy="1077461"/>
           </a:xfrm>
           <a:prstGeom prst="rect">
             <a:avLst/>
@@ -11696,13 +11727,13 @@
               </a:spcAft>
             </a:pPr>
             <a:r>
-              <a:rPr sz="1050" b="0" i="0">
+              <a:rPr sz="1300" b="0" i="0">
                 <a:solidFill>
                   <a:srgbClr val="3D4A63"/>
                 </a:solidFill>
                 <a:latin typeface="Arial"/>
               </a:rPr>
-              <a:t>•  Open over budgets 4, 6, 8, 16: 0, 12, 10, 12.</a:t>
+              <a:t>•  Open at B=4,6,8,16: 0, 12, 10, 12.</a:t>
             </a:r>
           </a:p>
           <a:p>
@@ -11715,175 +11746,27 @@
               </a:spcAft>
             </a:pPr>
             <a:r>
-              <a:rPr sz="1050" b="0" i="0">
+              <a:rPr sz="1300" b="0" i="0">
                 <a:solidFill>
                   <a:srgbClr val="3D4A63"/>
                 </a:solidFill>
                 <a:latin typeface="Arial"/>
               </a:rPr>
-              <a:t>•  Closed over the same budgets: 8, 8, 12, 11.</a:t>
-            </a:r>
-          </a:p>
-        </p:txBody>
-      </p:sp>
-      <p:sp>
-        <p:nvSpPr>
-          <p:cNvPr id="16" name="Rounded Rectangle 15"/>
+              <a:t>•  Closed: 8, 8, 12, 11.</a:t>
+            </a:r>
+          </a:p>
+        </p:txBody>
+      </p:sp>
+      <p:sp>
+        <p:nvSpPr>
+          <p:cNvPr id="16" name="Rectangle 15"/>
           <p:cNvSpPr/>
           <p:nvPr/>
         </p:nvSpPr>
         <p:spPr>
           <a:xfrm>
-            <a:off x="7439375" y="4367699"/>
-            <a:ext cx="4185391" cy="954108"/>
-          </a:xfrm>
-          <a:prstGeom prst="roundRect">
-            <a:avLst>
-              <a:gd name="adj" fmla="val 5500"/>
-            </a:avLst>
-          </a:prstGeom>
-          <a:solidFill>
-            <a:srgbClr val="F2F4F7"/>
-          </a:solidFill>
-          <a:ln w="12700">
-            <a:solidFill>
-              <a:srgbClr val="7A8496"/>
-            </a:solidFill>
-          </a:ln>
-          <a:effectLst/>
-        </p:spPr>
-        <p:style>
-          <a:lnRef idx="1">
-            <a:schemeClr val="accent1"/>
-          </a:lnRef>
-          <a:fillRef idx="3">
-            <a:schemeClr val="accent1"/>
-          </a:fillRef>
-          <a:effectRef idx="2">
-            <a:schemeClr val="accent1"/>
-          </a:effectRef>
-          <a:fontRef idx="minor">
-            <a:schemeClr val="lt1"/>
-          </a:fontRef>
-        </p:style>
-        <p:txBody>
-          <a:bodyPr rtlCol="0" anchor="ctr"/>
-          <a:lstStyle/>
-          <a:p>
-            <a:pPr algn="ctr"/>
-          </a:p>
-        </p:txBody>
-      </p:sp>
-      <p:sp>
-        <p:nvSpPr>
-          <p:cNvPr id="17" name="TextBox 16"/>
-          <p:cNvSpPr txBox="1"/>
-          <p:nvPr/>
-        </p:nvSpPr>
-        <p:spPr>
-          <a:xfrm>
-            <a:off x="7576535" y="4443137"/>
-            <a:ext cx="3911071" cy="274320"/>
-          </a:xfrm>
-          <a:prstGeom prst="rect">
-            <a:avLst/>
-          </a:prstGeom>
-          <a:noFill/>
-        </p:spPr>
-        <p:txBody>
-          <a:bodyPr wrap="square" lIns="36576" rIns="36576" tIns="18288" bIns="18288" anchor="t">
-            <a:spAutoFit/>
-          </a:bodyPr>
-          <a:lstStyle/>
-          <a:p>
-            <a:pPr algn="l">
-              <a:spcAft>
-                <a:spcPts val="0"/>
-              </a:spcAft>
-            </a:pPr>
-            <a:r>
-              <a:rPr sz="1200" b="1" i="0">
-                <a:solidFill>
-                  <a:srgbClr val="4A5568"/>
-                </a:solidFill>
-                <a:latin typeface="Arial"/>
-              </a:rPr>
-              <a:t>Null result</a:t>
-            </a:r>
-          </a:p>
-        </p:txBody>
-      </p:sp>
-      <p:sp>
-        <p:nvSpPr>
-          <p:cNvPr id="18" name="TextBox 17"/>
-          <p:cNvSpPr txBox="1"/>
-          <p:nvPr/>
-        </p:nvSpPr>
-        <p:spPr>
-          <a:xfrm>
-            <a:off x="7576535" y="4754033"/>
-            <a:ext cx="3911071" cy="485478"/>
-          </a:xfrm>
-          <a:prstGeom prst="rect">
-            <a:avLst/>
-          </a:prstGeom>
-          <a:noFill/>
-        </p:spPr>
-        <p:txBody>
-          <a:bodyPr wrap="square" lIns="36576" rIns="36576" tIns="18288" bIns="18288" anchor="t">
-            <a:spAutoFit/>
-          </a:bodyPr>
-          <a:lstStyle/>
-          <a:p>
-            <a:pPr algn="l" marL="219456" indent="-219456">
-              <a:lnSpc>
-                <a:spcPct val="105000"/>
-              </a:lnSpc>
-              <a:spcAft>
-                <a:spcPts val="500"/>
-              </a:spcAft>
-            </a:pPr>
-            <a:r>
-              <a:rPr sz="1050" b="0" i="0">
-                <a:solidFill>
-                  <a:srgbClr val="3D4A63"/>
-                </a:solidFill>
-                <a:latin typeface="Arial"/>
-              </a:rPr>
-              <a:t>•  Target 0.99: 0 of 12 in both new runs.</a:t>
-            </a:r>
-          </a:p>
-          <a:p>
-            <a:pPr algn="l" marL="219456" indent="-219456">
-              <a:lnSpc>
-                <a:spcPct val="105000"/>
-              </a:lnSpc>
-              <a:spcAft>
-                <a:spcPts val="500"/>
-              </a:spcAft>
-            </a:pPr>
-            <a:r>
-              <a:rPr sz="1050" b="0" i="0">
-                <a:solidFill>
-                  <a:srgbClr val="3D4A63"/>
-                </a:solidFill>
-                <a:latin typeface="Arial"/>
-              </a:rPr>
-              <a:t>•  Not evidence that it is unreachable.</a:t>
-            </a:r>
-          </a:p>
-        </p:txBody>
-      </p:sp>
-      <p:sp>
-        <p:nvSpPr>
-          <p:cNvPr id="19" name="Rectangle 18"/>
-          <p:cNvSpPr/>
-          <p:nvPr/>
-        </p:nvSpPr>
-        <p:spPr>
-          <a:xfrm>
-            <a:off x="566928" y="5422392"/>
-            <a:ext cx="45720" cy="329184"/>
+            <a:off x="566928" y="5605272"/>
+            <a:ext cx="45720" cy="310896"/>
           </a:xfrm>
           <a:prstGeom prst="rect">
             <a:avLst/>
@@ -11920,14 +11803,14 @@
       </p:sp>
       <p:sp>
         <p:nvSpPr>
-          <p:cNvPr id="20" name="TextBox 19"/>
+          <p:cNvPr id="17" name="TextBox 16"/>
           <p:cNvSpPr txBox="1"/>
           <p:nvPr/>
         </p:nvSpPr>
         <p:spPr>
           <a:xfrm>
-            <a:off x="713232" y="5394959"/>
-            <a:ext cx="10911535" cy="384048"/>
+            <a:off x="713232" y="5577840"/>
+            <a:ext cx="10911535" cy="365760"/>
           </a:xfrm>
           <a:prstGeom prst="rect">
             <a:avLst/>
@@ -11946,7 +11829,7 @@
               </a:spcAft>
             </a:pPr>
             <a:r>
-              <a:rPr sz="1150" b="1">
+              <a:rPr sz="1400" b="1">
                 <a:solidFill>
                   <a:srgbClr val="8C2F39"/>
                 </a:solidFill>
@@ -11955,7 +11838,7 @@
               <a:t>Next:  </a:t>
             </a:r>
             <a:r>
-              <a:rPr sz="1150" b="0">
+              <a:rPr sz="1400" b="0">
                 <a:solidFill>
                   <a:srgbClr val="3D4A63"/>
                 </a:solidFill>
@@ -11968,14 +11851,14 @@
       </p:sp>
       <p:sp>
         <p:nvSpPr>
-          <p:cNvPr id="21" name="TextBox 20"/>
+          <p:cNvPr id="18" name="TextBox 17"/>
           <p:cNvSpPr txBox="1"/>
           <p:nvPr/>
         </p:nvSpPr>
         <p:spPr>
           <a:xfrm>
-            <a:off x="566928" y="5980175"/>
-            <a:ext cx="11057839" cy="329184"/>
+            <a:off x="566928" y="6089904"/>
+            <a:ext cx="11057839" cy="292608"/>
           </a:xfrm>
           <a:prstGeom prst="rect">
             <a:avLst/>
@@ -11997,7 +11880,7 @@
               </a:spcAft>
             </a:pPr>
             <a:r>
-              <a:rPr sz="850" b="0" i="0">
+              <a:rPr sz="1050" b="0" i="0">
                 <a:solidFill>
                   <a:srgbClr val="929BAC"/>
                 </a:solidFill>
@@ -12010,14 +11893,14 @@
       </p:sp>
       <p:sp>
         <p:nvSpPr>
-          <p:cNvPr id="22" name="TextBox 21"/>
+          <p:cNvPr id="19" name="TextBox 18"/>
           <p:cNvSpPr txBox="1"/>
           <p:nvPr/>
         </p:nvSpPr>
         <p:spPr>
           <a:xfrm>
-            <a:off x="566928" y="6309359"/>
-            <a:ext cx="9399163" cy="219456"/>
+            <a:off x="566928" y="6382512"/>
+            <a:ext cx="9399163" cy="201168"/>
           </a:xfrm>
           <a:prstGeom prst="rect">
             <a:avLst/>
@@ -12036,7 +11919,7 @@
               </a:spcAft>
             </a:pPr>
             <a:r>
-              <a:rPr sz="850" b="0" i="0">
+              <a:rPr sz="950" b="0" i="0">
                 <a:solidFill>
                   <a:srgbClr val="929BAC"/>
                 </a:solidFill>
@@ -12049,14 +11932,14 @@
       </p:sp>
       <p:sp>
         <p:nvSpPr>
-          <p:cNvPr id="23" name="TextBox 22"/>
+          <p:cNvPr id="20" name="TextBox 19"/>
           <p:cNvSpPr txBox="1"/>
           <p:nvPr/>
         </p:nvSpPr>
         <p:spPr>
           <a:xfrm>
-            <a:off x="9966091" y="6309359"/>
-            <a:ext cx="1658675" cy="219456"/>
+            <a:off x="9966091" y="6382512"/>
+            <a:ext cx="1658675" cy="201168"/>
           </a:xfrm>
           <a:prstGeom prst="rect">
             <a:avLst/>
@@ -12075,7 +11958,7 @@
               </a:spcAft>
             </a:pPr>
             <a:r>
-              <a:rPr sz="850" b="0" i="0">
+              <a:rPr sz="950" b="0" i="0">
                 <a:solidFill>
                   <a:srgbClr val="929BAC"/>
                 </a:solidFill>
@@ -12156,8 +12039,8 @@
         </p:nvSpPr>
         <p:spPr>
           <a:xfrm>
-            <a:off x="566928" y="384048"/>
-            <a:ext cx="11057839" cy="237744"/>
+            <a:off x="566928" y="310896"/>
+            <a:ext cx="11057839" cy="219456"/>
           </a:xfrm>
           <a:prstGeom prst="rect">
             <a:avLst/>
@@ -12176,13 +12059,13 @@
               </a:spcAft>
             </a:pPr>
             <a:r>
-              <a:rPr sz="1000" b="1" i="0" spc="150">
+              <a:rPr sz="1100" b="1" i="0" spc="150">
                 <a:solidFill>
                   <a:srgbClr val="8C2F39"/>
                 </a:solidFill>
                 <a:latin typeface="Arial"/>
               </a:rPr>
-              <a:t>7 · INTERPRETATION</a:t>
+              <a:t>7 · WHAT THE RESULT MEANS</a:t>
             </a:r>
           </a:p>
         </p:txBody>
@@ -12195,8 +12078,8 @@
         </p:nvSpPr>
         <p:spPr>
           <a:xfrm>
-            <a:off x="566928" y="621792"/>
-            <a:ext cx="11057839" cy="530352"/>
+            <a:off x="566928" y="530352"/>
+            <a:ext cx="11057839" cy="566928"/>
           </a:xfrm>
           <a:prstGeom prst="rect">
             <a:avLst/>
@@ -12218,7 +12101,7 @@
               </a:spcAft>
             </a:pPr>
             <a:r>
-              <a:rPr sz="2500" b="1" i="0">
+              <a:rPr sz="2700" b="1" i="0">
                 <a:solidFill>
                   <a:srgbClr val="14213D"/>
                 </a:solidFill>
@@ -12237,7 +12120,7 @@
         </p:nvSpPr>
         <p:spPr>
           <a:xfrm>
-            <a:off x="566928" y="1170431"/>
+            <a:off x="566928" y="1115568"/>
             <a:ext cx="11057839" cy="310896"/>
           </a:xfrm>
           <a:prstGeom prst="rect">
@@ -12260,7 +12143,7 @@
               </a:spcAft>
             </a:pPr>
             <a:r>
-              <a:rPr sz="1250" b="0" i="0">
+              <a:rPr sz="1450" b="0" i="0">
                 <a:solidFill>
                   <a:srgbClr val="626E85"/>
                 </a:solidFill>
@@ -12279,7 +12162,7 @@
         </p:nvSpPr>
         <p:spPr>
           <a:xfrm>
-            <a:off x="566928" y="1591055"/>
+            <a:off x="566928" y="1499616"/>
             <a:ext cx="11057839" cy="10972"/>
           </a:xfrm>
           <a:prstGeom prst="rect">
@@ -12331,8 +12214,8 @@
         </p:blipFill>
         <p:spPr>
           <a:xfrm>
-            <a:off x="1455593" y="1828799"/>
-            <a:ext cx="4857373" cy="2324734"/>
+            <a:off x="1398446" y="1664208"/>
+            <a:ext cx="5635136" cy="2696972"/>
           </a:xfrm>
           <a:prstGeom prst="rect">
             <a:avLst/>
@@ -12347,8 +12230,8 @@
         </p:nvSpPr>
         <p:spPr>
           <a:xfrm>
-            <a:off x="566928" y="4208398"/>
-            <a:ext cx="6634703" cy="561975"/>
+            <a:off x="566928" y="4416044"/>
+            <a:ext cx="7298173" cy="471170"/>
           </a:xfrm>
           <a:prstGeom prst="rect">
             <a:avLst/>
@@ -12370,13 +12253,13 @@
               </a:spcAft>
             </a:pPr>
             <a:r>
-              <a:rPr sz="950" b="0" i="1">
+              <a:rPr sz="1150" b="0" i="1">
                 <a:solidFill>
                   <a:srgbClr val="626E85"/>
                 </a:solidFill>
                 <a:latin typeface="Arial"/>
               </a:rPr>
-              <a:t>x: seed. y: the final best-so-far validation trash fidelity that seed reached - pale for the earlier budget-8 run, solid for the budget-10 run measured here. Dashed line: the 0.95 target. Bars are single measured values, not averages.</a:t>
+              <a:t>x: seed. y: that seed's final best validation fidelity - pale for budget 8, solid for the budget 10 measured here. Dashed line: the 0.95 target. Single values, not averages.</a:t>
             </a:r>
           </a:p>
         </p:txBody>
@@ -12389,8 +12272,8 @@
         </p:nvSpPr>
         <p:spPr>
           <a:xfrm>
-            <a:off x="566928" y="4770373"/>
-            <a:ext cx="6634703" cy="405130"/>
+            <a:off x="566928" y="4887214"/>
+            <a:ext cx="7298173" cy="471170"/>
           </a:xfrm>
           <a:prstGeom prst="rect">
             <a:avLst/>
@@ -12409,7 +12292,7 @@
               </a:spcAft>
             </a:pPr>
             <a:r>
-              <a:rPr sz="950" b="1">
+              <a:rPr sz="1150" b="1">
                 <a:solidFill>
                   <a:srgbClr val="8C2F39"/>
                 </a:solidFill>
@@ -12418,13 +12301,13 @@
               <a:t>Does not show:  </a:t>
             </a:r>
             <a:r>
-              <a:rPr sz="950" b="0">
+              <a:rPr sz="1150" b="0">
                 <a:solidFill>
                   <a:srgbClr val="626E85"/>
                 </a:solidFill>
                 <a:latin typeface="Arial"/>
               </a:rPr>
-              <a:t>Not the trajectory within a run, not the rejected candidates, and not whether a third run would land the same way.</a:t>
+              <a:t>Not the path within a run, the rejected candidates, or whether a third run lands the same way.</a:t>
             </a:r>
           </a:p>
         </p:txBody>
@@ -12437,8 +12320,8 @@
         </p:nvSpPr>
         <p:spPr>
           <a:xfrm>
-            <a:off x="7439375" y="1828799"/>
-            <a:ext cx="4185391" cy="1011935"/>
+            <a:off x="8102845" y="1664208"/>
+            <a:ext cx="3521921" cy="1630404"/>
           </a:xfrm>
           <a:prstGeom prst="roundRect">
             <a:avLst>
@@ -12485,8 +12368,8 @@
         </p:nvSpPr>
         <p:spPr>
           <a:xfrm>
-            <a:off x="7576535" y="1904237"/>
-            <a:ext cx="3911071" cy="274320"/>
+            <a:off x="8267437" y="1754733"/>
+            <a:ext cx="3192737" cy="319786"/>
           </a:xfrm>
           <a:prstGeom prst="rect">
             <a:avLst/>
@@ -12505,7 +12388,7 @@
               </a:spcAft>
             </a:pPr>
             <a:r>
-              <a:rPr sz="1200" b="1" i="0">
+              <a:rPr sz="1450" b="1" i="0">
                 <a:solidFill>
                   <a:srgbClr val="1F4E79"/>
                 </a:solidFill>
@@ -12524,8 +12407,8 @@
         </p:nvSpPr>
         <p:spPr>
           <a:xfrm>
-            <a:off x="7576535" y="2215133"/>
-            <a:ext cx="3911071" cy="543306"/>
+            <a:off x="8267437" y="2074519"/>
+            <a:ext cx="3192737" cy="1121337"/>
           </a:xfrm>
           <a:prstGeom prst="rect">
             <a:avLst/>
@@ -12547,13 +12430,13 @@
               </a:spcAft>
             </a:pPr>
             <a:r>
-              <a:rPr sz="1050" b="0" i="0">
+              <a:rPr sz="1300" b="0" i="0">
                 <a:solidFill>
                   <a:srgbClr val="3D4A63"/>
                 </a:solidFill>
                 <a:latin typeface="Arial"/>
               </a:rPr>
-              <a:t>•  Seeds at the target: 9 to 5 of 12.</a:t>
+              <a:t>•  Seeds at target: 9 to 5 of 12.</a:t>
             </a:r>
           </a:p>
           <a:p>
@@ -12566,13 +12449,13 @@
               </a:spcAft>
             </a:pPr>
             <a:r>
-              <a:rPr sz="1050" b="0" i="0">
+              <a:rPr sz="1300" b="0" i="0">
                 <a:solidFill>
                   <a:srgbClr val="3D4A63"/>
                 </a:solidFill>
                 <a:latin typeface="Arial"/>
               </a:rPr>
-              <a:t>•  Mean fidelity moved only -0.0076; 17 of 24 results sit within 0.01 of it.</a:t>
+              <a:t>•  Mean moved only -0.0076; 17 of 24 within 0.01.</a:t>
             </a:r>
           </a:p>
         </p:txBody>
@@ -12585,8 +12468,8 @@
         </p:nvSpPr>
         <p:spPr>
           <a:xfrm>
-            <a:off x="7439375" y="2968751"/>
-            <a:ext cx="4185391" cy="1011935"/>
+            <a:off x="8102845" y="3422628"/>
+            <a:ext cx="3521921" cy="1880891"/>
           </a:xfrm>
           <a:prstGeom prst="roundRect">
             <a:avLst>
@@ -12633,8 +12516,8 @@
         </p:nvSpPr>
         <p:spPr>
           <a:xfrm>
-            <a:off x="7576535" y="3044189"/>
-            <a:ext cx="3911071" cy="274320"/>
+            <a:off x="8267437" y="3513154"/>
+            <a:ext cx="3192737" cy="319786"/>
           </a:xfrm>
           <a:prstGeom prst="rect">
             <a:avLst/>
@@ -12653,7 +12536,7 @@
               </a:spcAft>
             </a:pPr>
             <a:r>
-              <a:rPr sz="1200" b="1" i="0">
+              <a:rPr sz="1450" b="1" i="0">
                 <a:solidFill>
                   <a:srgbClr val="7A5A15"/>
                 </a:solidFill>
@@ -12672,8 +12555,8 @@
         </p:nvSpPr>
         <p:spPr>
           <a:xfrm>
-            <a:off x="7576535" y="3355085"/>
-            <a:ext cx="3911071" cy="543306"/>
+            <a:off x="8267437" y="3832940"/>
+            <a:ext cx="3192737" cy="1371824"/>
           </a:xfrm>
           <a:prstGeom prst="rect">
             <a:avLst/>
@@ -12695,13 +12578,13 @@
               </a:spcAft>
             </a:pPr>
             <a:r>
-              <a:rPr sz="1050" b="0" i="0">
+              <a:rPr sz="1300" b="0" i="0">
                 <a:solidFill>
                   <a:srgbClr val="3D4A63"/>
                 </a:solidFill>
                 <a:latin typeface="Arial"/>
               </a:rPr>
-              <a:t>•  Near a threshold inside the distribution, the count is a knife-edge statistic.</a:t>
+              <a:t>•  A threshold inside the distribution makes the count knife-edge.</a:t>
             </a:r>
           </a:p>
           <a:p>
@@ -12714,174 +12597,26 @@
               </a:spcAft>
             </a:pPr>
             <a:r>
-              <a:rPr sz="1050" b="0" i="0">
+              <a:rPr sz="1300" b="0" i="0">
                 <a:solidFill>
                   <a:srgbClr val="3D4A63"/>
                 </a:solidFill>
                 <a:latin typeface="Arial"/>
               </a:rPr>
-              <a:t>•  Only the budget was varied, so no cause is isolated.</a:t>
-            </a:r>
-          </a:p>
-        </p:txBody>
-      </p:sp>
-      <p:sp>
-        <p:nvSpPr>
-          <p:cNvPr id="16" name="Rounded Rectangle 15"/>
+              <a:t>•  Only the budget varied: no cause isolated.</a:t>
+            </a:r>
+          </a:p>
+        </p:txBody>
+      </p:sp>
+      <p:sp>
+        <p:nvSpPr>
+          <p:cNvPr id="16" name="Rectangle 15"/>
           <p:cNvSpPr/>
           <p:nvPr/>
         </p:nvSpPr>
         <p:spPr>
           <a:xfrm>
-            <a:off x="7439375" y="4108703"/>
-            <a:ext cx="4185391" cy="1011935"/>
-          </a:xfrm>
-          <a:prstGeom prst="roundRect">
-            <a:avLst>
-              <a:gd name="adj" fmla="val 5500"/>
-            </a:avLst>
-          </a:prstGeom>
-          <a:solidFill>
-            <a:srgbClr val="F2F4F7"/>
-          </a:solidFill>
-          <a:ln w="12700">
-            <a:solidFill>
-              <a:srgbClr val="7A8496"/>
-            </a:solidFill>
-          </a:ln>
-          <a:effectLst/>
-        </p:spPr>
-        <p:style>
-          <a:lnRef idx="1">
-            <a:schemeClr val="accent1"/>
-          </a:lnRef>
-          <a:fillRef idx="3">
-            <a:schemeClr val="accent1"/>
-          </a:fillRef>
-          <a:effectRef idx="2">
-            <a:schemeClr val="accent1"/>
-          </a:effectRef>
-          <a:fontRef idx="minor">
-            <a:schemeClr val="lt1"/>
-          </a:fontRef>
-        </p:style>
-        <p:txBody>
-          <a:bodyPr rtlCol="0" anchor="ctr"/>
-          <a:lstStyle/>
-          <a:p>
-            <a:pPr algn="ctr"/>
-          </a:p>
-        </p:txBody>
-      </p:sp>
-      <p:sp>
-        <p:nvSpPr>
-          <p:cNvPr id="17" name="TextBox 16"/>
-          <p:cNvSpPr txBox="1"/>
-          <p:nvPr/>
-        </p:nvSpPr>
-        <p:spPr>
-          <a:xfrm>
-            <a:off x="7576535" y="4184141"/>
-            <a:ext cx="3911071" cy="274320"/>
-          </a:xfrm>
-          <a:prstGeom prst="rect">
-            <a:avLst/>
-          </a:prstGeom>
-          <a:noFill/>
-        </p:spPr>
-        <p:txBody>
-          <a:bodyPr wrap="square" lIns="36576" rIns="36576" tIns="18288" bIns="18288" anchor="t">
-            <a:spAutoFit/>
-          </a:bodyPr>
-          <a:lstStyle/>
-          <a:p>
-            <a:pPr algn="l">
-              <a:spcAft>
-                <a:spcPts val="0"/>
-              </a:spcAft>
-            </a:pPr>
-            <a:r>
-              <a:rPr sz="1200" b="1" i="0">
-                <a:solidFill>
-                  <a:srgbClr val="4A5568"/>
-                </a:solidFill>
-                <a:latin typeface="Arial"/>
-              </a:rPr>
-              <a:t>Not supported</a:t>
-            </a:r>
-          </a:p>
-        </p:txBody>
-      </p:sp>
-      <p:sp>
-        <p:nvSpPr>
-          <p:cNvPr id="18" name="TextBox 17"/>
-          <p:cNvSpPr txBox="1"/>
-          <p:nvPr/>
-        </p:nvSpPr>
-        <p:spPr>
-          <a:xfrm>
-            <a:off x="7576535" y="4495037"/>
-            <a:ext cx="3911071" cy="543306"/>
-          </a:xfrm>
-          <a:prstGeom prst="rect">
-            <a:avLst/>
-          </a:prstGeom>
-          <a:noFill/>
-        </p:spPr>
-        <p:txBody>
-          <a:bodyPr wrap="square" lIns="36576" rIns="36576" tIns="18288" bIns="18288" anchor="t">
-            <a:spAutoFit/>
-          </a:bodyPr>
-          <a:lstStyle/>
-          <a:p>
-            <a:pPr algn="l" marL="219456" indent="-219456">
-              <a:lnSpc>
-                <a:spcPct val="105000"/>
-              </a:lnSpc>
-              <a:spcAft>
-                <a:spcPts val="500"/>
-              </a:spcAft>
-            </a:pPr>
-            <a:r>
-              <a:rPr sz="1050" b="0" i="0">
-                <a:solidFill>
-                  <a:srgbClr val="3D4A63"/>
-                </a:solidFill>
-                <a:latin typeface="Arial"/>
-              </a:rPr>
-              <a:t>•  That more budget harms the closed loop.</a:t>
-            </a:r>
-          </a:p>
-          <a:p>
-            <a:pPr algn="l" marL="219456" indent="-219456">
-              <a:lnSpc>
-                <a:spcPct val="105000"/>
-              </a:lnSpc>
-              <a:spcAft>
-                <a:spcPts val="500"/>
-              </a:spcAft>
-            </a:pPr>
-            <a:r>
-              <a:rPr sz="1050" b="0" i="0">
-                <a:solidFill>
-                  <a:srgbClr val="3D4A63"/>
-                </a:solidFill>
-                <a:latin typeface="Arial"/>
-              </a:rPr>
-              <a:t>•  That the closed loop is generally worse.</a:t>
-            </a:r>
-          </a:p>
-        </p:txBody>
-      </p:sp>
-      <p:sp>
-        <p:nvSpPr>
-          <p:cNvPr id="19" name="Rectangle 18"/>
-          <p:cNvSpPr/>
-          <p:nvPr/>
-        </p:nvSpPr>
-        <p:spPr>
-          <a:xfrm>
-            <a:off x="566928" y="5193792"/>
+            <a:off x="566928" y="5340096"/>
             <a:ext cx="11057839" cy="530352"/>
           </a:xfrm>
           <a:prstGeom prst="rect">
@@ -12919,13 +12654,13 @@
       </p:sp>
       <p:sp>
         <p:nvSpPr>
-          <p:cNvPr id="20" name="Rectangle 19"/>
+          <p:cNvPr id="17" name="Rectangle 16"/>
           <p:cNvSpPr/>
           <p:nvPr/>
         </p:nvSpPr>
         <p:spPr>
           <a:xfrm>
-            <a:off x="566928" y="5193792"/>
+            <a:off x="566928" y="5340096"/>
             <a:ext cx="45720" cy="530352"/>
           </a:xfrm>
           <a:prstGeom prst="rect">
@@ -12963,13 +12698,13 @@
       </p:sp>
       <p:sp>
         <p:nvSpPr>
-          <p:cNvPr id="21" name="TextBox 20"/>
+          <p:cNvPr id="18" name="TextBox 17"/>
           <p:cNvSpPr txBox="1"/>
           <p:nvPr/>
         </p:nvSpPr>
         <p:spPr>
           <a:xfrm>
-            <a:off x="749808" y="5193792"/>
+            <a:off x="749808" y="5340096"/>
             <a:ext cx="10746943" cy="530352"/>
           </a:xfrm>
           <a:prstGeom prst="rect">
@@ -12992,7 +12727,7 @@
               </a:spcAft>
             </a:pPr>
             <a:r>
-              <a:rPr sz="1200" b="1" i="0">
+              <a:rPr sz="1450" b="1" i="0">
                 <a:solidFill>
                   <a:srgbClr val="14213D"/>
                 </a:solidFill>
@@ -13005,14 +12740,14 @@
       </p:sp>
       <p:sp>
         <p:nvSpPr>
-          <p:cNvPr id="22" name="Rectangle 21"/>
+          <p:cNvPr id="19" name="Rectangle 18"/>
           <p:cNvSpPr/>
           <p:nvPr/>
         </p:nvSpPr>
         <p:spPr>
           <a:xfrm>
-            <a:off x="566928" y="5852159"/>
-            <a:ext cx="45720" cy="329184"/>
+            <a:off x="566928" y="5971032"/>
+            <a:ext cx="45720" cy="310896"/>
           </a:xfrm>
           <a:prstGeom prst="rect">
             <a:avLst/>
@@ -13049,14 +12784,14 @@
       </p:sp>
       <p:sp>
         <p:nvSpPr>
-          <p:cNvPr id="23" name="TextBox 22"/>
+          <p:cNvPr id="20" name="TextBox 19"/>
           <p:cNvSpPr txBox="1"/>
           <p:nvPr/>
         </p:nvSpPr>
         <p:spPr>
           <a:xfrm>
-            <a:off x="713232" y="5824727"/>
-            <a:ext cx="10911535" cy="384048"/>
+            <a:off x="713232" y="5943600"/>
+            <a:ext cx="10911535" cy="365760"/>
           </a:xfrm>
           <a:prstGeom prst="rect">
             <a:avLst/>
@@ -13075,7 +12810,7 @@
               </a:spcAft>
             </a:pPr>
             <a:r>
-              <a:rPr sz="1150" b="1">
+              <a:rPr sz="1400" b="1">
                 <a:solidFill>
                   <a:srgbClr val="8C2F39"/>
                 </a:solidFill>
@@ -13084,7 +12819,7 @@
               <a:t>Next:  </a:t>
             </a:r>
             <a:r>
-              <a:rPr sz="1150" b="0">
+              <a:rPr sz="1400" b="0">
                 <a:solidFill>
                   <a:srgbClr val="3D4A63"/>
                 </a:solidFill>
@@ -13097,14 +12832,14 @@
       </p:sp>
       <p:sp>
         <p:nvSpPr>
-          <p:cNvPr id="24" name="TextBox 23"/>
+          <p:cNvPr id="21" name="TextBox 20"/>
           <p:cNvSpPr txBox="1"/>
           <p:nvPr/>
         </p:nvSpPr>
         <p:spPr>
           <a:xfrm>
-            <a:off x="566928" y="6309359"/>
-            <a:ext cx="9399163" cy="219456"/>
+            <a:off x="566928" y="6382512"/>
+            <a:ext cx="9399163" cy="201168"/>
           </a:xfrm>
           <a:prstGeom prst="rect">
             <a:avLst/>
@@ -13123,7 +12858,7 @@
               </a:spcAft>
             </a:pPr>
             <a:r>
-              <a:rPr sz="850" b="0" i="0">
+              <a:rPr sz="950" b="0" i="0">
                 <a:solidFill>
                   <a:srgbClr val="929BAC"/>
                 </a:solidFill>
@@ -13136,14 +12871,14 @@
       </p:sp>
       <p:sp>
         <p:nvSpPr>
-          <p:cNvPr id="25" name="TextBox 24"/>
+          <p:cNvPr id="22" name="TextBox 21"/>
           <p:cNvSpPr txBox="1"/>
           <p:nvPr/>
         </p:nvSpPr>
         <p:spPr>
           <a:xfrm>
-            <a:off x="9966091" y="6309359"/>
-            <a:ext cx="1658675" cy="219456"/>
+            <a:off x="9966091" y="6382512"/>
+            <a:ext cx="1658675" cy="201168"/>
           </a:xfrm>
           <a:prstGeom prst="rect">
             <a:avLst/>
@@ -13162,7 +12897,7 @@
               </a:spcAft>
             </a:pPr>
             <a:r>
-              <a:rPr sz="850" b="0" i="0">
+              <a:rPr sz="950" b="0" i="0">
                 <a:solidFill>
                   <a:srgbClr val="929BAC"/>
                 </a:solidFill>
@@ -13243,8 +12978,8 @@
         </p:nvSpPr>
         <p:spPr>
           <a:xfrm>
-            <a:off x="566928" y="384048"/>
-            <a:ext cx="11057839" cy="237744"/>
+            <a:off x="566928" y="310896"/>
+            <a:ext cx="11057839" cy="219456"/>
           </a:xfrm>
           <a:prstGeom prst="rect">
             <a:avLst/>
@@ -13263,7 +12998,7 @@
               </a:spcAft>
             </a:pPr>
             <a:r>
-              <a:rPr sz="1000" b="1" i="0" spc="150">
+              <a:rPr sz="1100" b="1" i="0" spc="150">
                 <a:solidFill>
                   <a:srgbClr val="8C2F39"/>
                 </a:solidFill>
@@ -13282,8 +13017,8 @@
         </p:nvSpPr>
         <p:spPr>
           <a:xfrm>
-            <a:off x="566928" y="621792"/>
-            <a:ext cx="11057839" cy="530352"/>
+            <a:off x="566928" y="530352"/>
+            <a:ext cx="11057839" cy="566928"/>
           </a:xfrm>
           <a:prstGeom prst="rect">
             <a:avLst/>
@@ -13305,13 +13040,13 @@
               </a:spcAft>
             </a:pPr>
             <a:r>
-              <a:rPr sz="2500" b="1" i="0">
+              <a:rPr sz="2700" b="1" i="0">
                 <a:solidFill>
                   <a:srgbClr val="14213D"/>
                 </a:solidFill>
                 <a:latin typeface="Arial"/>
               </a:rPr>
-              <a:t>What bounds this result, and what is recorded but unresolved</a:t>
+              <a:t>What bounds this, and what stays unresolved</a:t>
             </a:r>
           </a:p>
         </p:txBody>
@@ -13324,7 +13059,7 @@
         </p:nvSpPr>
         <p:spPr>
           <a:xfrm>
-            <a:off x="566928" y="1170431"/>
+            <a:off x="566928" y="1115568"/>
             <a:ext cx="11057839" cy="310896"/>
           </a:xfrm>
           <a:prstGeom prst="rect">
@@ -13347,7 +13082,7 @@
               </a:spcAft>
             </a:pPr>
             <a:r>
-              <a:rPr sz="1250" b="0" i="0">
+              <a:rPr sz="1450" b="0" i="0">
                 <a:solidFill>
                   <a:srgbClr val="626E85"/>
                 </a:solidFill>
@@ -13366,7 +13101,7 @@
         </p:nvSpPr>
         <p:spPr>
           <a:xfrm>
-            <a:off x="566928" y="1591055"/>
+            <a:off x="566928" y="1499616"/>
             <a:ext cx="11057839" cy="10972"/>
           </a:xfrm>
           <a:prstGeom prst="rect">
@@ -13410,8 +13145,8 @@
         </p:nvSpPr>
         <p:spPr>
           <a:xfrm>
-            <a:off x="566928" y="1828799"/>
-            <a:ext cx="2586151" cy="2215896"/>
+            <a:off x="566928" y="1664208"/>
+            <a:ext cx="2586151" cy="3266968"/>
           </a:xfrm>
           <a:prstGeom prst="roundRect">
             <a:avLst>
@@ -13458,8 +13193,8 @@
         </p:nvSpPr>
         <p:spPr>
           <a:xfrm>
-            <a:off x="704088" y="1904237"/>
-            <a:ext cx="2311831" cy="274320"/>
+            <a:off x="731520" y="1754733"/>
+            <a:ext cx="2256967" cy="548132"/>
           </a:xfrm>
           <a:prstGeom prst="rect">
             <a:avLst/>
@@ -13478,7 +13213,7 @@
               </a:spcAft>
             </a:pPr>
             <a:r>
-              <a:rPr sz="1200" b="1" i="0">
+              <a:rPr sz="1450" b="1" i="0">
                 <a:solidFill>
                   <a:srgbClr val="86302B"/>
                 </a:solidFill>
@@ -13497,8 +13232,8 @@
         </p:nvSpPr>
         <p:spPr>
           <a:xfrm>
-            <a:off x="704088" y="2215133"/>
-            <a:ext cx="2311831" cy="1747266"/>
+            <a:off x="731520" y="2302865"/>
+            <a:ext cx="2256967" cy="2529555"/>
           </a:xfrm>
           <a:prstGeom prst="rect">
             <a:avLst/>
@@ -13520,13 +13255,13 @@
               </a:spcAft>
             </a:pPr>
             <a:r>
-              <a:rPr sz="1050" b="0" i="0">
+              <a:rPr sz="1300" b="0" i="0">
                 <a:solidFill>
                   <a:srgbClr val="3D4A63"/>
                 </a:solidFill>
                 <a:latin typeface="Arial"/>
               </a:rPr>
-              <a:t>•  A repeat landing on the other side of the threshold; margins are thousandths wide.</a:t>
+              <a:t>•  A repeat landing the other side of the line - margins are thousandths.</a:t>
             </a:r>
           </a:p>
           <a:p>
@@ -13539,7 +13274,7 @@
               </a:spcAft>
             </a:pPr>
             <a:r>
-              <a:rPr sz="1050" b="0" i="0">
+              <a:rPr sz="1300" b="0" i="0">
                 <a:solidFill>
                   <a:srgbClr val="3D4A63"/>
                 </a:solidFill>
@@ -13558,8 +13293,8 @@
         </p:nvSpPr>
         <p:spPr>
           <a:xfrm>
-            <a:off x="3390823" y="1828799"/>
-            <a:ext cx="2586151" cy="2215896"/>
+            <a:off x="3390823" y="1664208"/>
+            <a:ext cx="2586151" cy="3266968"/>
           </a:xfrm>
           <a:prstGeom prst="roundRect">
             <a:avLst>
@@ -13606,8 +13341,8 @@
         </p:nvSpPr>
         <p:spPr>
           <a:xfrm>
-            <a:off x="3527983" y="1904237"/>
-            <a:ext cx="2311831" cy="274320"/>
+            <a:off x="3555415" y="1754733"/>
+            <a:ext cx="2256967" cy="319786"/>
           </a:xfrm>
           <a:prstGeom prst="rect">
             <a:avLst/>
@@ -13626,7 +13361,7 @@
               </a:spcAft>
             </a:pPr>
             <a:r>
-              <a:rPr sz="1200" b="1" i="0">
+              <a:rPr sz="1450" b="1" i="0">
                 <a:solidFill>
                   <a:srgbClr val="7A5A15"/>
                 </a:solidFill>
@@ -13645,8 +13380,8 @@
         </p:nvSpPr>
         <p:spPr>
           <a:xfrm>
-            <a:off x="3527983" y="2215133"/>
-            <a:ext cx="2311831" cy="1747266"/>
+            <a:off x="3555415" y="2074519"/>
+            <a:ext cx="2256967" cy="2757901"/>
           </a:xfrm>
           <a:prstGeom prst="rect">
             <a:avLst/>
@@ -13668,13 +13403,13 @@
               </a:spcAft>
             </a:pPr>
             <a:r>
-              <a:rPr sz="1050" b="0" i="0">
+              <a:rPr sz="1300" b="0" i="0">
                 <a:solidFill>
                   <a:srgbClr val="3D4A63"/>
                 </a:solidFill>
                 <a:latin typeface="Arial"/>
               </a:rPr>
-              <a:t>•  4 qubits, noiseless simulation, one circuit-capacity rule, one model snapshot, one XXZ anchor.</a:t>
+              <a:t>•  4 qubits, noiseless, one capacity rule, one model, one XXZ anchor.</a:t>
             </a:r>
           </a:p>
           <a:p>
@@ -13687,13 +13422,13 @@
               </a:spcAft>
             </a:pPr>
             <a:r>
-              <a:rPr sz="1050" b="0" i="0">
+              <a:rPr sz="1300" b="0" i="0">
                 <a:solidFill>
                   <a:srgbClr val="3D4A63"/>
                 </a:solidFill>
                 <a:latin typeface="Arial"/>
               </a:rPr>
-              <a:t>•  12 paired seeds; one open-loop pool shared across them, so 12 successes are not 12 generations.</a:t>
+              <a:t>•  One open-loop pool shared across the 12 seeds, not 12 generations.</a:t>
             </a:r>
           </a:p>
         </p:txBody>
@@ -13706,8 +13441,8 @@
         </p:nvSpPr>
         <p:spPr>
           <a:xfrm>
-            <a:off x="6214719" y="1828799"/>
-            <a:ext cx="2586151" cy="2215896"/>
+            <a:off x="6214719" y="1664208"/>
+            <a:ext cx="2586151" cy="3266968"/>
           </a:xfrm>
           <a:prstGeom prst="roundRect">
             <a:avLst>
@@ -13754,8 +13489,8 @@
         </p:nvSpPr>
         <p:spPr>
           <a:xfrm>
-            <a:off x="6351879" y="1904237"/>
-            <a:ext cx="2311831" cy="274320"/>
+            <a:off x="6379311" y="1754733"/>
+            <a:ext cx="2256967" cy="319786"/>
           </a:xfrm>
           <a:prstGeom prst="rect">
             <a:avLst/>
@@ -13774,13 +13509,13 @@
               </a:spcAft>
             </a:pPr>
             <a:r>
-              <a:rPr sz="1200" b="1" i="0">
+              <a:rPr sz="1450" b="1" i="0">
                 <a:solidFill>
                   <a:srgbClr val="4A5568"/>
                 </a:solidFill>
                 <a:latin typeface="Arial"/>
               </a:rPr>
-              <a:t>Negative and null results kept</a:t>
+              <a:t>Negative results kept</a:t>
             </a:r>
           </a:p>
         </p:txBody>
@@ -13793,8 +13528,8 @@
         </p:nvSpPr>
         <p:spPr>
           <a:xfrm>
-            <a:off x="6351879" y="2215133"/>
-            <a:ext cx="2311831" cy="1747266"/>
+            <a:off x="6379311" y="2074519"/>
+            <a:ext cx="2256967" cy="2757901"/>
           </a:xfrm>
           <a:prstGeom prst="rect">
             <a:avLst/>
@@ -13816,7 +13551,7 @@
               </a:spcAft>
             </a:pPr>
             <a:r>
-              <a:rPr sz="1050" b="0" i="0">
+              <a:rPr sz="1300" b="0" i="0">
                 <a:solidFill>
                   <a:srgbClr val="3D4A63"/>
                 </a:solidFill>
@@ -13835,7 +13570,7 @@
               </a:spcAft>
             </a:pPr>
             <a:r>
-              <a:rPr sz="1050" b="0" i="0">
+              <a:rPr sz="1300" b="0" i="0">
                 <a:solidFill>
                   <a:srgbClr val="3D4A63"/>
                 </a:solidFill>
@@ -13854,7 +13589,7 @@
               </a:spcAft>
             </a:pPr>
             <a:r>
-              <a:rPr sz="1050" b="0" i="0">
+              <a:rPr sz="1300" b="0" i="0">
                 <a:solidFill>
                   <a:srgbClr val="3D4A63"/>
                 </a:solidFill>
@@ -13873,8 +13608,8 @@
         </p:nvSpPr>
         <p:spPr>
           <a:xfrm>
-            <a:off x="9038615" y="1828799"/>
-            <a:ext cx="2586151" cy="2215896"/>
+            <a:off x="9038615" y="1664208"/>
+            <a:ext cx="2586151" cy="3266968"/>
           </a:xfrm>
           <a:prstGeom prst="roundRect">
             <a:avLst>
@@ -13921,8 +13656,8 @@
         </p:nvSpPr>
         <p:spPr>
           <a:xfrm>
-            <a:off x="9175775" y="1904237"/>
-            <a:ext cx="2311831" cy="274320"/>
+            <a:off x="9203207" y="1754733"/>
+            <a:ext cx="2256967" cy="319786"/>
           </a:xfrm>
           <a:prstGeom prst="rect">
             <a:avLst/>
@@ -13941,13 +13676,13 @@
               </a:spcAft>
             </a:pPr>
             <a:r>
-              <a:rPr sz="1200" b="1" i="0">
+              <a:rPr sz="1450" b="1" i="0">
                 <a:solidFill>
                   <a:srgbClr val="7A5A15"/>
                 </a:solidFill>
                 <a:latin typeface="Arial"/>
               </a:rPr>
-              <a:t>Left unresolved on purpose</a:t>
+              <a:t>Left open on purpose</a:t>
             </a:r>
           </a:p>
         </p:txBody>
@@ -13960,8 +13695,8 @@
         </p:nvSpPr>
         <p:spPr>
           <a:xfrm>
-            <a:off x="9175775" y="2215133"/>
-            <a:ext cx="2311831" cy="1747266"/>
+            <a:off x="9203207" y="2074519"/>
+            <a:ext cx="2256967" cy="2757901"/>
           </a:xfrm>
           <a:prstGeom prst="rect">
             <a:avLst/>
@@ -13983,13 +13718,13 @@
               </a:spcAft>
             </a:pPr>
             <a:r>
-              <a:rPr sz="1050" b="0" i="0">
+              <a:rPr sz="1300" b="0" i="0">
                 <a:solidFill>
                   <a:srgbClr val="3D4A63"/>
                 </a:solidFill>
                 <a:latin typeface="Arial"/>
               </a:rPr>
-              <a:t>•  6 and 8 qubits and the alternative model were not probed; every method sits at 0-3 of 12 there.</a:t>
+              <a:t>•  6 and 8 qubits and the other model: every method sits at 0-3 of 12.</a:t>
             </a:r>
           </a:p>
           <a:p>
@@ -14002,13 +13737,13 @@
               </a:spcAft>
             </a:pPr>
             <a:r>
-              <a:rPr sz="1050" b="0" i="0">
+              <a:rPr sz="1300" b="0" i="0">
                 <a:solidFill>
                   <a:srgbClr val="3D4A63"/>
                 </a:solidFill>
                 <a:latin typeface="Arial"/>
               </a:rPr>
-              <a:t>•  A blind sweep cannot separate invalid generation from too little search or capacity.</a:t>
+              <a:t>•  A blind sweep cannot separate the causes.</a:t>
             </a:r>
           </a:p>
           <a:p>
@@ -14021,7 +13756,7 @@
               </a:spcAft>
             </a:pPr>
             <a:r>
-              <a:rPr sz="1050" b="0" i="0">
+              <a:rPr sz="1300" b="0" i="0">
                 <a:solidFill>
                   <a:srgbClr val="3D4A63"/>
                 </a:solidFill>
@@ -14040,8 +13775,8 @@
         </p:nvSpPr>
         <p:spPr>
           <a:xfrm>
-            <a:off x="566928" y="4282440"/>
-            <a:ext cx="11057839" cy="420624"/>
+            <a:off x="566928" y="5168920"/>
+            <a:ext cx="11057839" cy="457200"/>
           </a:xfrm>
           <a:prstGeom prst="roundRect">
             <a:avLst>
@@ -14088,8 +13823,8 @@
         </p:nvSpPr>
         <p:spPr>
           <a:xfrm>
-            <a:off x="713232" y="4282440"/>
-            <a:ext cx="10783519" cy="420624"/>
+            <a:off x="713232" y="5168920"/>
+            <a:ext cx="10783519" cy="457200"/>
           </a:xfrm>
           <a:prstGeom prst="rect">
             <a:avLst/>
@@ -14108,7 +13843,7 @@
               </a:spcAft>
             </a:pPr>
             <a:r>
-              <a:rPr sz="1150" b="1">
+              <a:rPr sz="1400" b="1">
                 <a:solidFill>
                   <a:srgbClr val="7A5A15"/>
                 </a:solidFill>
@@ -14117,7 +13852,7 @@
               <a:t>Open question:  </a:t>
             </a:r>
             <a:r>
-              <a:rPr sz="1150" b="0">
+              <a:rPr sz="1400" b="0">
                 <a:solidFill>
                   <a:srgbClr val="3D4A63"/>
                 </a:solidFill>
@@ -14136,8 +13871,8 @@
         </p:nvSpPr>
         <p:spPr>
           <a:xfrm>
-            <a:off x="566928" y="4831080"/>
-            <a:ext cx="45720" cy="329184"/>
+            <a:off x="566928" y="5726704"/>
+            <a:ext cx="45720" cy="310896"/>
           </a:xfrm>
           <a:prstGeom prst="rect">
             <a:avLst/>
@@ -14180,8 +13915,8 @@
         </p:nvSpPr>
         <p:spPr>
           <a:xfrm>
-            <a:off x="713232" y="4803648"/>
-            <a:ext cx="10911535" cy="384048"/>
+            <a:off x="713232" y="5699272"/>
+            <a:ext cx="10911535" cy="365760"/>
           </a:xfrm>
           <a:prstGeom prst="rect">
             <a:avLst/>
@@ -14200,7 +13935,7 @@
               </a:spcAft>
             </a:pPr>
             <a:r>
-              <a:rPr sz="1150" b="1">
+              <a:rPr sz="1400" b="1">
                 <a:solidFill>
                   <a:srgbClr val="8C2F39"/>
                 </a:solidFill>
@@ -14209,7 +13944,7 @@
               <a:t>Next:  </a:t>
             </a:r>
             <a:r>
-              <a:rPr sz="1150" b="0">
+              <a:rPr sz="1400" b="0">
                 <a:solidFill>
                   <a:srgbClr val="3D4A63"/>
                 </a:solidFill>
@@ -14228,8 +13963,8 @@
         </p:nvSpPr>
         <p:spPr>
           <a:xfrm>
-            <a:off x="566928" y="6309359"/>
-            <a:ext cx="9399163" cy="219456"/>
+            <a:off x="566928" y="6382512"/>
+            <a:ext cx="9399163" cy="201168"/>
           </a:xfrm>
           <a:prstGeom prst="rect">
             <a:avLst/>
@@ -14248,7 +13983,7 @@
               </a:spcAft>
             </a:pPr>
             <a:r>
-              <a:rPr sz="850" b="0" i="0">
+              <a:rPr sz="950" b="0" i="0">
                 <a:solidFill>
                   <a:srgbClr val="929BAC"/>
                 </a:solidFill>
@@ -14267,8 +14002,8 @@
         </p:nvSpPr>
         <p:spPr>
           <a:xfrm>
-            <a:off x="9966091" y="6309359"/>
-            <a:ext cx="1658675" cy="219456"/>
+            <a:off x="9966091" y="6382512"/>
+            <a:ext cx="1658675" cy="201168"/>
           </a:xfrm>
           <a:prstGeom prst="rect">
             <a:avLst/>
@@ -14287,7 +14022,7 @@
               </a:spcAft>
             </a:pPr>
             <a:r>
-              <a:rPr sz="850" b="0" i="0">
+              <a:rPr sz="950" b="0" i="0">
                 <a:solidFill>
                   <a:srgbClr val="929BAC"/>
                 </a:solidFill>
